--- a/docs/mutli-modal.pptx
+++ b/docs/mutli-modal.pptx
@@ -7,6 +7,7 @@
   <p:sldIdLst>
     <p:sldId id="256" r:id="rId2"/>
     <p:sldId id="257" r:id="rId3"/>
+    <p:sldId id="258" r:id="rId4"/>
   </p:sldIdLst>
   <p:sldSz cx="12192000" cy="6858000"/>
   <p:notesSz cx="6858000" cy="9144000"/>
@@ -116,13 +117,188 @@
 <file path=ppt/revisionInfo.xml><?xml version="1.0" encoding="utf-8"?>
 <p1510:revInfo xmlns:a="http://schemas.openxmlformats.org/drawingml/2006/main" xmlns:r="http://schemas.openxmlformats.org/officeDocument/2006/relationships" xmlns:p1510="http://schemas.microsoft.com/office/powerpoint/2015/10/main">
   <p1510:revLst>
-    <p1510:client id="{5F62FE2B-DE30-464F-BC57-6DCAA9A7790B}" v="60" dt="2023-11-20T03:15:17.891"/>
+    <p1510:client id="{3A4F8A34-488B-F940-94F3-DAA1CBB4F4E1}" v="18" dt="2024-06-05T06:11:23.671"/>
   </p1510:revLst>
 </p1510:revInfo>
 </file>
 
 <file path=ppt/changesInfos/changesInfo1.xml><?xml version="1.0" encoding="utf-8"?>
 <pc:chgInfo xmlns:a="http://schemas.openxmlformats.org/drawingml/2006/main" xmlns:r="http://schemas.openxmlformats.org/officeDocument/2006/relationships" xmlns:ac="http://schemas.microsoft.com/office/drawing/2013/main/command" xmlns:pc="http://schemas.microsoft.com/office/powerpoint/2013/main/command">
+  <pc:docChgLst>
+    <pc:chgData name="Ziyang Chen" userId="1924be8fb255cdff" providerId="LiveId" clId="{3A4F8A34-488B-F940-94F3-DAA1CBB4F4E1}"/>
+    <pc:docChg chg="undo custSel addSld modSld">
+      <pc:chgData name="Ziyang Chen" userId="1924be8fb255cdff" providerId="LiveId" clId="{3A4F8A34-488B-F940-94F3-DAA1CBB4F4E1}" dt="2024-06-05T06:11:23.670" v="219" actId="164"/>
+      <pc:docMkLst>
+        <pc:docMk/>
+      </pc:docMkLst>
+      <pc:sldChg chg="modSp mod">
+        <pc:chgData name="Ziyang Chen" userId="1924be8fb255cdff" providerId="LiveId" clId="{3A4F8A34-488B-F940-94F3-DAA1CBB4F4E1}" dt="2024-06-05T06:01:21.164" v="0" actId="1076"/>
+        <pc:sldMkLst>
+          <pc:docMk/>
+          <pc:sldMk cId="3926679691" sldId="257"/>
+        </pc:sldMkLst>
+        <pc:grpChg chg="mod">
+          <ac:chgData name="Ziyang Chen" userId="1924be8fb255cdff" providerId="LiveId" clId="{3A4F8A34-488B-F940-94F3-DAA1CBB4F4E1}" dt="2024-06-05T06:01:21.164" v="0" actId="1076"/>
+          <ac:grpSpMkLst>
+            <pc:docMk/>
+            <pc:sldMk cId="3926679691" sldId="257"/>
+            <ac:grpSpMk id="10" creationId="{C817B538-77FB-3F2B-6EE4-57B3FAB67926}"/>
+          </ac:grpSpMkLst>
+        </pc:grpChg>
+      </pc:sldChg>
+      <pc:sldChg chg="addSp delSp modSp new mod">
+        <pc:chgData name="Ziyang Chen" userId="1924be8fb255cdff" providerId="LiveId" clId="{3A4F8A34-488B-F940-94F3-DAA1CBB4F4E1}" dt="2024-06-05T06:11:23.670" v="219" actId="164"/>
+        <pc:sldMkLst>
+          <pc:docMk/>
+          <pc:sldMk cId="1592561747" sldId="258"/>
+        </pc:sldMkLst>
+        <pc:spChg chg="del">
+          <ac:chgData name="Ziyang Chen" userId="1924be8fb255cdff" providerId="LiveId" clId="{3A4F8A34-488B-F940-94F3-DAA1CBB4F4E1}" dt="2024-06-05T06:01:46.285" v="3" actId="478"/>
+          <ac:spMkLst>
+            <pc:docMk/>
+            <pc:sldMk cId="1592561747" sldId="258"/>
+            <ac:spMk id="2" creationId="{B93465B5-9912-CA1C-1044-795504AC3632}"/>
+          </ac:spMkLst>
+        </pc:spChg>
+        <pc:spChg chg="del">
+          <ac:chgData name="Ziyang Chen" userId="1924be8fb255cdff" providerId="LiveId" clId="{3A4F8A34-488B-F940-94F3-DAA1CBB4F4E1}" dt="2024-06-05T06:01:45.559" v="2" actId="478"/>
+          <ac:spMkLst>
+            <pc:docMk/>
+            <pc:sldMk cId="1592561747" sldId="258"/>
+            <ac:spMk id="3" creationId="{0790C7B5-C1D9-84FE-2CD7-1F25A86DBE96}"/>
+          </ac:spMkLst>
+        </pc:spChg>
+        <pc:spChg chg="add mod">
+          <ac:chgData name="Ziyang Chen" userId="1924be8fb255cdff" providerId="LiveId" clId="{3A4F8A34-488B-F940-94F3-DAA1CBB4F4E1}" dt="2024-06-05T06:11:23.670" v="219" actId="164"/>
+          <ac:spMkLst>
+            <pc:docMk/>
+            <pc:sldMk cId="1592561747" sldId="258"/>
+            <ac:spMk id="6" creationId="{0D6A5281-B939-557E-4814-8EE6141D12D0}"/>
+          </ac:spMkLst>
+        </pc:spChg>
+        <pc:spChg chg="add mod">
+          <ac:chgData name="Ziyang Chen" userId="1924be8fb255cdff" providerId="LiveId" clId="{3A4F8A34-488B-F940-94F3-DAA1CBB4F4E1}" dt="2024-06-05T06:05:38.564" v="39" actId="767"/>
+          <ac:spMkLst>
+            <pc:docMk/>
+            <pc:sldMk cId="1592561747" sldId="258"/>
+            <ac:spMk id="7" creationId="{9EFE1CD1-AD3A-842E-998C-EB580E7FCDF6}"/>
+          </ac:spMkLst>
+        </pc:spChg>
+        <pc:spChg chg="add mod">
+          <ac:chgData name="Ziyang Chen" userId="1924be8fb255cdff" providerId="LiveId" clId="{3A4F8A34-488B-F940-94F3-DAA1CBB4F4E1}" dt="2024-06-05T06:05:38.188" v="38" actId="767"/>
+          <ac:spMkLst>
+            <pc:docMk/>
+            <pc:sldMk cId="1592561747" sldId="258"/>
+            <ac:spMk id="8" creationId="{A3358C39-8257-3EC3-8234-0417C2D6F8D0}"/>
+          </ac:spMkLst>
+        </pc:spChg>
+        <pc:spChg chg="add mod">
+          <ac:chgData name="Ziyang Chen" userId="1924be8fb255cdff" providerId="LiveId" clId="{3A4F8A34-488B-F940-94F3-DAA1CBB4F4E1}" dt="2024-06-05T06:05:40.570" v="41" actId="767"/>
+          <ac:spMkLst>
+            <pc:docMk/>
+            <pc:sldMk cId="1592561747" sldId="258"/>
+            <ac:spMk id="9" creationId="{1AE0C487-D6D9-D74E-8218-D52288CEFCD8}"/>
+          </ac:spMkLst>
+        </pc:spChg>
+        <pc:spChg chg="add mod">
+          <ac:chgData name="Ziyang Chen" userId="1924be8fb255cdff" providerId="LiveId" clId="{3A4F8A34-488B-F940-94F3-DAA1CBB4F4E1}" dt="2024-06-05T06:11:23.670" v="219" actId="164"/>
+          <ac:spMkLst>
+            <pc:docMk/>
+            <pc:sldMk cId="1592561747" sldId="258"/>
+            <ac:spMk id="10" creationId="{39841A8A-0B28-4FFC-9A2E-93FB0FE905B3}"/>
+          </ac:spMkLst>
+        </pc:spChg>
+        <pc:spChg chg="add mod">
+          <ac:chgData name="Ziyang Chen" userId="1924be8fb255cdff" providerId="LiveId" clId="{3A4F8A34-488B-F940-94F3-DAA1CBB4F4E1}" dt="2024-06-05T06:11:23.670" v="219" actId="164"/>
+          <ac:spMkLst>
+            <pc:docMk/>
+            <pc:sldMk cId="1592561747" sldId="258"/>
+            <ac:spMk id="11" creationId="{D8474605-BD38-8F12-EC15-7C0FCB621310}"/>
+          </ac:spMkLst>
+        </pc:spChg>
+        <pc:spChg chg="add mod">
+          <ac:chgData name="Ziyang Chen" userId="1924be8fb255cdff" providerId="LiveId" clId="{3A4F8A34-488B-F940-94F3-DAA1CBB4F4E1}" dt="2024-06-05T06:11:23.670" v="219" actId="164"/>
+          <ac:spMkLst>
+            <pc:docMk/>
+            <pc:sldMk cId="1592561747" sldId="258"/>
+            <ac:spMk id="12" creationId="{A9C6F751-8FD6-C05C-F91F-776ABE57CFD7}"/>
+          </ac:spMkLst>
+        </pc:spChg>
+        <pc:spChg chg="add mod">
+          <ac:chgData name="Ziyang Chen" userId="1924be8fb255cdff" providerId="LiveId" clId="{3A4F8A34-488B-F940-94F3-DAA1CBB4F4E1}" dt="2024-06-05T06:11:23.670" v="219" actId="164"/>
+          <ac:spMkLst>
+            <pc:docMk/>
+            <pc:sldMk cId="1592561747" sldId="258"/>
+            <ac:spMk id="13" creationId="{A9FF722E-C9ED-E584-A4BC-CB7749B66588}"/>
+          </ac:spMkLst>
+        </pc:spChg>
+        <pc:spChg chg="add mod">
+          <ac:chgData name="Ziyang Chen" userId="1924be8fb255cdff" providerId="LiveId" clId="{3A4F8A34-488B-F940-94F3-DAA1CBB4F4E1}" dt="2024-06-05T06:11:23.670" v="219" actId="164"/>
+          <ac:spMkLst>
+            <pc:docMk/>
+            <pc:sldMk cId="1592561747" sldId="258"/>
+            <ac:spMk id="14" creationId="{0119D5E1-9C10-4BDF-47F2-CBE20E314518}"/>
+          </ac:spMkLst>
+        </pc:spChg>
+        <pc:spChg chg="add mod">
+          <ac:chgData name="Ziyang Chen" userId="1924be8fb255cdff" providerId="LiveId" clId="{3A4F8A34-488B-F940-94F3-DAA1CBB4F4E1}" dt="2024-06-05T06:09:33.129" v="81"/>
+          <ac:spMkLst>
+            <pc:docMk/>
+            <pc:sldMk cId="1592561747" sldId="258"/>
+            <ac:spMk id="16" creationId="{78C5FC1A-0CA5-BD39-6F72-65BF8361A5C6}"/>
+          </ac:spMkLst>
+        </pc:spChg>
+        <pc:spChg chg="add mod">
+          <ac:chgData name="Ziyang Chen" userId="1924be8fb255cdff" providerId="LiveId" clId="{3A4F8A34-488B-F940-94F3-DAA1CBB4F4E1}" dt="2024-06-05T06:11:23.670" v="219" actId="164"/>
+          <ac:spMkLst>
+            <pc:docMk/>
+            <pc:sldMk cId="1592561747" sldId="258"/>
+            <ac:spMk id="17" creationId="{5DD7C510-7AE9-86AF-0640-391C39C6DEB2}"/>
+          </ac:spMkLst>
+        </pc:spChg>
+        <pc:spChg chg="add mod">
+          <ac:chgData name="Ziyang Chen" userId="1924be8fb255cdff" providerId="LiveId" clId="{3A4F8A34-488B-F940-94F3-DAA1CBB4F4E1}" dt="2024-06-05T06:11:23.670" v="219" actId="164"/>
+          <ac:spMkLst>
+            <pc:docMk/>
+            <pc:sldMk cId="1592561747" sldId="258"/>
+            <ac:spMk id="18" creationId="{657D32F1-A909-7672-8529-00E39C4A2DC9}"/>
+          </ac:spMkLst>
+        </pc:spChg>
+        <pc:spChg chg="add mod">
+          <ac:chgData name="Ziyang Chen" userId="1924be8fb255cdff" providerId="LiveId" clId="{3A4F8A34-488B-F940-94F3-DAA1CBB4F4E1}" dt="2024-06-05T06:11:23.670" v="219" actId="164"/>
+          <ac:spMkLst>
+            <pc:docMk/>
+            <pc:sldMk cId="1592561747" sldId="258"/>
+            <ac:spMk id="19" creationId="{77D2F1AF-E349-696F-FE96-B140EE13B4B5}"/>
+          </ac:spMkLst>
+        </pc:spChg>
+        <pc:grpChg chg="add mod">
+          <ac:chgData name="Ziyang Chen" userId="1924be8fb255cdff" providerId="LiveId" clId="{3A4F8A34-488B-F940-94F3-DAA1CBB4F4E1}" dt="2024-06-05T06:11:23.670" v="219" actId="164"/>
+          <ac:grpSpMkLst>
+            <pc:docMk/>
+            <pc:sldMk cId="1592561747" sldId="258"/>
+            <ac:grpSpMk id="20" creationId="{A9D108F0-63A6-BD8F-37F5-CB1056DD6AC9}"/>
+          </ac:grpSpMkLst>
+        </pc:grpChg>
+        <pc:picChg chg="add mod">
+          <ac:chgData name="Ziyang Chen" userId="1924be8fb255cdff" providerId="LiveId" clId="{3A4F8A34-488B-F940-94F3-DAA1CBB4F4E1}" dt="2024-06-05T06:11:23.670" v="219" actId="164"/>
+          <ac:picMkLst>
+            <pc:docMk/>
+            <pc:sldMk cId="1592561747" sldId="258"/>
+            <ac:picMk id="5" creationId="{0391296F-529D-B915-9EA7-FFA2CBA256E9}"/>
+          </ac:picMkLst>
+        </pc:picChg>
+        <pc:picChg chg="add mod">
+          <ac:chgData name="Ziyang Chen" userId="1924be8fb255cdff" providerId="LiveId" clId="{3A4F8A34-488B-F940-94F3-DAA1CBB4F4E1}" dt="2024-06-05T06:09:33.129" v="81"/>
+          <ac:picMkLst>
+            <pc:docMk/>
+            <pc:sldMk cId="1592561747" sldId="258"/>
+            <ac:picMk id="15" creationId="{AC8E6C30-B577-9318-A965-7237738754EB}"/>
+          </ac:picMkLst>
+        </pc:picChg>
+      </pc:sldChg>
+    </pc:docChg>
+  </pc:docChgLst>
   <pc:docChgLst>
     <pc:chgData name="Chen, Ziyang" userId="b9969a22-7821-4ff2-b1dd-470ec11815fe" providerId="ADAL" clId="{5F62FE2B-DE30-464F-BC57-6DCAA9A7790B}"/>
     <pc:docChg chg="undo custSel addSld modSld">
@@ -506,7 +682,7 @@
           <a:p>
             <a:fld id="{3FEC199F-4198-4061-A48E-45842FC1156B}" type="datetimeFigureOut">
               <a:rPr lang="en-US" smtClean="0"/>
-              <a:t>11/19/2023</a:t>
+              <a:t>6/4/24</a:t>
             </a:fld>
             <a:endParaRPr lang="en-US"/>
           </a:p>
@@ -706,7 +882,7 @@
           <a:p>
             <a:fld id="{3FEC199F-4198-4061-A48E-45842FC1156B}" type="datetimeFigureOut">
               <a:rPr lang="en-US" smtClean="0"/>
-              <a:t>11/19/2023</a:t>
+              <a:t>6/4/24</a:t>
             </a:fld>
             <a:endParaRPr lang="en-US"/>
           </a:p>
@@ -916,7 +1092,7 @@
           <a:p>
             <a:fld id="{3FEC199F-4198-4061-A48E-45842FC1156B}" type="datetimeFigureOut">
               <a:rPr lang="en-US" smtClean="0"/>
-              <a:t>11/19/2023</a:t>
+              <a:t>6/4/24</a:t>
             </a:fld>
             <a:endParaRPr lang="en-US"/>
           </a:p>
@@ -1116,7 +1292,7 @@
           <a:p>
             <a:fld id="{3FEC199F-4198-4061-A48E-45842FC1156B}" type="datetimeFigureOut">
               <a:rPr lang="en-US" smtClean="0"/>
-              <a:t>11/19/2023</a:t>
+              <a:t>6/4/24</a:t>
             </a:fld>
             <a:endParaRPr lang="en-US"/>
           </a:p>
@@ -1392,7 +1568,7 @@
           <a:p>
             <a:fld id="{3FEC199F-4198-4061-A48E-45842FC1156B}" type="datetimeFigureOut">
               <a:rPr lang="en-US" smtClean="0"/>
-              <a:t>11/19/2023</a:t>
+              <a:t>6/4/24</a:t>
             </a:fld>
             <a:endParaRPr lang="en-US"/>
           </a:p>
@@ -1660,7 +1836,7 @@
           <a:p>
             <a:fld id="{3FEC199F-4198-4061-A48E-45842FC1156B}" type="datetimeFigureOut">
               <a:rPr lang="en-US" smtClean="0"/>
-              <a:t>11/19/2023</a:t>
+              <a:t>6/4/24</a:t>
             </a:fld>
             <a:endParaRPr lang="en-US"/>
           </a:p>
@@ -2075,7 +2251,7 @@
           <a:p>
             <a:fld id="{3FEC199F-4198-4061-A48E-45842FC1156B}" type="datetimeFigureOut">
               <a:rPr lang="en-US" smtClean="0"/>
-              <a:t>11/19/2023</a:t>
+              <a:t>6/4/24</a:t>
             </a:fld>
             <a:endParaRPr lang="en-US"/>
           </a:p>
@@ -2217,7 +2393,7 @@
           <a:p>
             <a:fld id="{3FEC199F-4198-4061-A48E-45842FC1156B}" type="datetimeFigureOut">
               <a:rPr lang="en-US" smtClean="0"/>
-              <a:t>11/19/2023</a:t>
+              <a:t>6/4/24</a:t>
             </a:fld>
             <a:endParaRPr lang="en-US"/>
           </a:p>
@@ -2330,7 +2506,7 @@
           <a:p>
             <a:fld id="{3FEC199F-4198-4061-A48E-45842FC1156B}" type="datetimeFigureOut">
               <a:rPr lang="en-US" smtClean="0"/>
-              <a:t>11/19/2023</a:t>
+              <a:t>6/4/24</a:t>
             </a:fld>
             <a:endParaRPr lang="en-US"/>
           </a:p>
@@ -2643,7 +2819,7 @@
           <a:p>
             <a:fld id="{3FEC199F-4198-4061-A48E-45842FC1156B}" type="datetimeFigureOut">
               <a:rPr lang="en-US" smtClean="0"/>
-              <a:t>11/19/2023</a:t>
+              <a:t>6/4/24</a:t>
             </a:fld>
             <a:endParaRPr lang="en-US"/>
           </a:p>
@@ -2932,7 +3108,7 @@
           <a:p>
             <a:fld id="{3FEC199F-4198-4061-A48E-45842FC1156B}" type="datetimeFigureOut">
               <a:rPr lang="en-US" smtClean="0"/>
-              <a:t>11/19/2023</a:t>
+              <a:t>6/4/24</a:t>
             </a:fld>
             <a:endParaRPr lang="en-US"/>
           </a:p>
@@ -3175,7 +3351,7 @@
           <a:p>
             <a:fld id="{3FEC199F-4198-4061-A48E-45842FC1156B}" type="datetimeFigureOut">
               <a:rPr lang="en-US" smtClean="0"/>
-              <a:t>11/19/2023</a:t>
+              <a:t>6/4/24</a:t>
             </a:fld>
             <a:endParaRPr lang="en-US"/>
           </a:p>
@@ -4006,7 +4182,7 @@
         </p:nvGrpSpPr>
         <p:grpSpPr>
           <a:xfrm>
-            <a:off x="7095460" y="1502734"/>
+            <a:off x="2050494" y="1303038"/>
             <a:ext cx="2743200" cy="2729023"/>
             <a:chOff x="7095460" y="1502734"/>
             <a:chExt cx="2743200" cy="2729023"/>
@@ -4111,6 +4287,710 @@
     <p:extLst>
       <p:ext uri="{BB962C8B-B14F-4D97-AF65-F5344CB8AC3E}">
         <p14:creationId xmlns:p14="http://schemas.microsoft.com/office/powerpoint/2010/main" val="3926679691"/>
+      </p:ext>
+    </p:extLst>
+  </p:cSld>
+  <p:clrMapOvr>
+    <a:masterClrMapping/>
+  </p:clrMapOvr>
+</p:sld>
+</file>
+
+<file path=ppt/slides/slide3.xml><?xml version="1.0" encoding="utf-8"?>
+<p:sld xmlns:a="http://schemas.openxmlformats.org/drawingml/2006/main" xmlns:r="http://schemas.openxmlformats.org/officeDocument/2006/relationships" xmlns:p="http://schemas.openxmlformats.org/presentationml/2006/main">
+  <p:cSld>
+    <p:spTree>
+      <p:nvGrpSpPr>
+        <p:cNvPr id="1" name=""/>
+        <p:cNvGrpSpPr/>
+        <p:nvPr/>
+      </p:nvGrpSpPr>
+      <p:grpSpPr>
+        <a:xfrm>
+          <a:off x="0" y="0"/>
+          <a:ext cx="0" cy="0"/>
+          <a:chOff x="0" y="0"/>
+          <a:chExt cx="0" cy="0"/>
+        </a:xfrm>
+      </p:grpSpPr>
+      <p:grpSp>
+        <p:nvGrpSpPr>
+          <p:cNvPr id="20" name="Group 19">
+            <a:extLst>
+              <a:ext uri="{FF2B5EF4-FFF2-40B4-BE49-F238E27FC236}">
+                <a16:creationId xmlns:a16="http://schemas.microsoft.com/office/drawing/2014/main" id="{A9D108F0-63A6-BD8F-37F5-CB1056DD6AC9}"/>
+              </a:ext>
+            </a:extLst>
+          </p:cNvPr>
+          <p:cNvGrpSpPr/>
+          <p:nvPr/>
+        </p:nvGrpSpPr>
+        <p:grpSpPr>
+          <a:xfrm>
+            <a:off x="3960506" y="1990605"/>
+            <a:ext cx="3974070" cy="3974070"/>
+            <a:chOff x="3960506" y="1990605"/>
+            <a:chExt cx="3974070" cy="3974070"/>
+          </a:xfrm>
+        </p:grpSpPr>
+        <p:pic>
+          <p:nvPicPr>
+            <p:cNvPr id="5" name="Picture 4" descr="A cat looking up at the camera&#10;&#10;Description automatically generated">
+              <a:extLst>
+                <a:ext uri="{FF2B5EF4-FFF2-40B4-BE49-F238E27FC236}">
+                  <a16:creationId xmlns:a16="http://schemas.microsoft.com/office/drawing/2014/main" id="{0391296F-529D-B915-9EA7-FFA2CBA256E9}"/>
+                </a:ext>
+              </a:extLst>
+            </p:cNvPr>
+            <p:cNvPicPr>
+              <a:picLocks noChangeAspect="1"/>
+            </p:cNvPicPr>
+            <p:nvPr/>
+          </p:nvPicPr>
+          <p:blipFill>
+            <a:blip r:embed="rId2">
+              <a:extLst>
+                <a:ext uri="{28A0092B-C50C-407E-A947-70E740481C1C}">
+                  <a14:useLocalDpi xmlns:a14="http://schemas.microsoft.com/office/drawing/2010/main" val="0"/>
+                </a:ext>
+              </a:extLst>
+            </a:blip>
+            <a:stretch>
+              <a:fillRect/>
+            </a:stretch>
+          </p:blipFill>
+          <p:spPr>
+            <a:xfrm>
+              <a:off x="3960506" y="1990605"/>
+              <a:ext cx="3974070" cy="3974070"/>
+            </a:xfrm>
+            <a:prstGeom prst="rect">
+              <a:avLst/>
+            </a:prstGeom>
+          </p:spPr>
+        </p:pic>
+        <p:sp>
+          <p:nvSpPr>
+            <p:cNvPr id="6" name="Rounded Rectangle 5">
+              <a:extLst>
+                <a:ext uri="{FF2B5EF4-FFF2-40B4-BE49-F238E27FC236}">
+                  <a16:creationId xmlns:a16="http://schemas.microsoft.com/office/drawing/2014/main" id="{0D6A5281-B939-557E-4814-8EE6141D12D0}"/>
+                </a:ext>
+              </a:extLst>
+            </p:cNvPr>
+            <p:cNvSpPr>
+              <a:spLocks noChangeAspect="1"/>
+            </p:cNvSpPr>
+            <p:nvPr/>
+          </p:nvSpPr>
+          <p:spPr>
+            <a:xfrm>
+              <a:off x="4100029" y="2109027"/>
+              <a:ext cx="1097280" cy="1097280"/>
+            </a:xfrm>
+            <a:prstGeom prst="roundRect">
+              <a:avLst>
+                <a:gd name="adj" fmla="val 0"/>
+              </a:avLst>
+            </a:prstGeom>
+            <a:noFill/>
+            <a:ln w="38100">
+              <a:solidFill>
+                <a:schemeClr val="accent4">
+                  <a:lumMod val="40000"/>
+                  <a:lumOff val="60000"/>
+                </a:schemeClr>
+              </a:solidFill>
+            </a:ln>
+          </p:spPr>
+          <p:style>
+            <a:lnRef idx="2">
+              <a:schemeClr val="accent1">
+                <a:shade val="15000"/>
+              </a:schemeClr>
+            </a:lnRef>
+            <a:fillRef idx="1">
+              <a:schemeClr val="accent1"/>
+            </a:fillRef>
+            <a:effectRef idx="0">
+              <a:schemeClr val="accent1"/>
+            </a:effectRef>
+            <a:fontRef idx="minor">
+              <a:schemeClr val="lt1"/>
+            </a:fontRef>
+          </p:style>
+          <p:txBody>
+            <a:bodyPr rtlCol="0" anchor="ctr"/>
+            <a:lstStyle/>
+            <a:p>
+              <a:pPr algn="ctr"/>
+              <a:r>
+                <a:rPr lang="en-US" sz="3200" dirty="0">
+                  <a:solidFill>
+                    <a:schemeClr val="accent4">
+                      <a:lumMod val="40000"/>
+                      <a:lumOff val="60000"/>
+                    </a:schemeClr>
+                  </a:solidFill>
+                </a:rPr>
+                <a:t>1</a:t>
+              </a:r>
+            </a:p>
+          </p:txBody>
+        </p:sp>
+        <p:sp>
+          <p:nvSpPr>
+            <p:cNvPr id="10" name="Rounded Rectangle 9">
+              <a:extLst>
+                <a:ext uri="{FF2B5EF4-FFF2-40B4-BE49-F238E27FC236}">
+                  <a16:creationId xmlns:a16="http://schemas.microsoft.com/office/drawing/2014/main" id="{39841A8A-0B28-4FFC-9A2E-93FB0FE905B3}"/>
+                </a:ext>
+              </a:extLst>
+            </p:cNvPr>
+            <p:cNvSpPr>
+              <a:spLocks noChangeAspect="1"/>
+            </p:cNvSpPr>
+            <p:nvPr/>
+          </p:nvSpPr>
+          <p:spPr>
+            <a:xfrm>
+              <a:off x="5398901" y="2109027"/>
+              <a:ext cx="1097280" cy="1097280"/>
+            </a:xfrm>
+            <a:prstGeom prst="roundRect">
+              <a:avLst>
+                <a:gd name="adj" fmla="val 0"/>
+              </a:avLst>
+            </a:prstGeom>
+            <a:noFill/>
+            <a:ln w="38100">
+              <a:solidFill>
+                <a:schemeClr val="accent4">
+                  <a:lumMod val="40000"/>
+                  <a:lumOff val="60000"/>
+                </a:schemeClr>
+              </a:solidFill>
+            </a:ln>
+          </p:spPr>
+          <p:style>
+            <a:lnRef idx="2">
+              <a:schemeClr val="accent1">
+                <a:shade val="15000"/>
+              </a:schemeClr>
+            </a:lnRef>
+            <a:fillRef idx="1">
+              <a:schemeClr val="accent1"/>
+            </a:fillRef>
+            <a:effectRef idx="0">
+              <a:schemeClr val="accent1"/>
+            </a:effectRef>
+            <a:fontRef idx="minor">
+              <a:schemeClr val="lt1"/>
+            </a:fontRef>
+          </p:style>
+          <p:txBody>
+            <a:bodyPr rtlCol="0" anchor="ctr"/>
+            <a:lstStyle/>
+            <a:p>
+              <a:pPr algn="ctr"/>
+              <a:r>
+                <a:rPr lang="en-US" sz="3200" dirty="0">
+                  <a:solidFill>
+                    <a:schemeClr val="accent4">
+                      <a:lumMod val="40000"/>
+                      <a:lumOff val="60000"/>
+                    </a:schemeClr>
+                  </a:solidFill>
+                </a:rPr>
+                <a:t>2</a:t>
+              </a:r>
+            </a:p>
+          </p:txBody>
+        </p:sp>
+        <p:sp>
+          <p:nvSpPr>
+            <p:cNvPr id="11" name="Rounded Rectangle 10">
+              <a:extLst>
+                <a:ext uri="{FF2B5EF4-FFF2-40B4-BE49-F238E27FC236}">
+                  <a16:creationId xmlns:a16="http://schemas.microsoft.com/office/drawing/2014/main" id="{D8474605-BD38-8F12-EC15-7C0FCB621310}"/>
+                </a:ext>
+              </a:extLst>
+            </p:cNvPr>
+            <p:cNvSpPr>
+              <a:spLocks noChangeAspect="1"/>
+            </p:cNvSpPr>
+            <p:nvPr/>
+          </p:nvSpPr>
+          <p:spPr>
+            <a:xfrm>
+              <a:off x="4100029" y="3429000"/>
+              <a:ext cx="1097280" cy="1097280"/>
+            </a:xfrm>
+            <a:prstGeom prst="roundRect">
+              <a:avLst>
+                <a:gd name="adj" fmla="val 0"/>
+              </a:avLst>
+            </a:prstGeom>
+            <a:noFill/>
+            <a:ln w="38100">
+              <a:solidFill>
+                <a:schemeClr val="accent4">
+                  <a:lumMod val="40000"/>
+                  <a:lumOff val="60000"/>
+                </a:schemeClr>
+              </a:solidFill>
+            </a:ln>
+          </p:spPr>
+          <p:style>
+            <a:lnRef idx="2">
+              <a:schemeClr val="accent1">
+                <a:shade val="15000"/>
+              </a:schemeClr>
+            </a:lnRef>
+            <a:fillRef idx="1">
+              <a:schemeClr val="accent1"/>
+            </a:fillRef>
+            <a:effectRef idx="0">
+              <a:schemeClr val="accent1"/>
+            </a:effectRef>
+            <a:fontRef idx="minor">
+              <a:schemeClr val="lt1"/>
+            </a:fontRef>
+          </p:style>
+          <p:txBody>
+            <a:bodyPr rtlCol="0" anchor="ctr"/>
+            <a:lstStyle/>
+            <a:p>
+              <a:pPr algn="ctr"/>
+              <a:r>
+                <a:rPr lang="en-US" sz="3200" dirty="0">
+                  <a:solidFill>
+                    <a:schemeClr val="accent4">
+                      <a:lumMod val="40000"/>
+                      <a:lumOff val="60000"/>
+                    </a:schemeClr>
+                  </a:solidFill>
+                </a:rPr>
+                <a:t>4</a:t>
+              </a:r>
+            </a:p>
+          </p:txBody>
+        </p:sp>
+        <p:sp>
+          <p:nvSpPr>
+            <p:cNvPr id="12" name="Rounded Rectangle 11">
+              <a:extLst>
+                <a:ext uri="{FF2B5EF4-FFF2-40B4-BE49-F238E27FC236}">
+                  <a16:creationId xmlns:a16="http://schemas.microsoft.com/office/drawing/2014/main" id="{A9C6F751-8FD6-C05C-F91F-776ABE57CFD7}"/>
+                </a:ext>
+              </a:extLst>
+            </p:cNvPr>
+            <p:cNvSpPr>
+              <a:spLocks noChangeAspect="1"/>
+            </p:cNvSpPr>
+            <p:nvPr/>
+          </p:nvSpPr>
+          <p:spPr>
+            <a:xfrm>
+              <a:off x="6697773" y="2109027"/>
+              <a:ext cx="1097280" cy="1097280"/>
+            </a:xfrm>
+            <a:prstGeom prst="roundRect">
+              <a:avLst>
+                <a:gd name="adj" fmla="val 0"/>
+              </a:avLst>
+            </a:prstGeom>
+            <a:noFill/>
+            <a:ln w="38100">
+              <a:solidFill>
+                <a:schemeClr val="accent4">
+                  <a:lumMod val="40000"/>
+                  <a:lumOff val="60000"/>
+                </a:schemeClr>
+              </a:solidFill>
+            </a:ln>
+          </p:spPr>
+          <p:style>
+            <a:lnRef idx="2">
+              <a:schemeClr val="accent1">
+                <a:shade val="15000"/>
+              </a:schemeClr>
+            </a:lnRef>
+            <a:fillRef idx="1">
+              <a:schemeClr val="accent1"/>
+            </a:fillRef>
+            <a:effectRef idx="0">
+              <a:schemeClr val="accent1"/>
+            </a:effectRef>
+            <a:fontRef idx="minor">
+              <a:schemeClr val="lt1"/>
+            </a:fontRef>
+          </p:style>
+          <p:txBody>
+            <a:bodyPr rtlCol="0" anchor="ctr"/>
+            <a:lstStyle/>
+            <a:p>
+              <a:pPr algn="ctr"/>
+              <a:r>
+                <a:rPr lang="en-US" sz="3200" dirty="0">
+                  <a:solidFill>
+                    <a:schemeClr val="accent4">
+                      <a:lumMod val="40000"/>
+                      <a:lumOff val="60000"/>
+                    </a:schemeClr>
+                  </a:solidFill>
+                </a:rPr>
+                <a:t>3</a:t>
+              </a:r>
+            </a:p>
+          </p:txBody>
+        </p:sp>
+        <p:sp>
+          <p:nvSpPr>
+            <p:cNvPr id="13" name="Rounded Rectangle 12">
+              <a:extLst>
+                <a:ext uri="{FF2B5EF4-FFF2-40B4-BE49-F238E27FC236}">
+                  <a16:creationId xmlns:a16="http://schemas.microsoft.com/office/drawing/2014/main" id="{A9FF722E-C9ED-E584-A4BC-CB7749B66588}"/>
+                </a:ext>
+              </a:extLst>
+            </p:cNvPr>
+            <p:cNvSpPr>
+              <a:spLocks noChangeAspect="1"/>
+            </p:cNvSpPr>
+            <p:nvPr/>
+          </p:nvSpPr>
+          <p:spPr>
+            <a:xfrm>
+              <a:off x="6697773" y="3444378"/>
+              <a:ext cx="1097280" cy="1097280"/>
+            </a:xfrm>
+            <a:prstGeom prst="roundRect">
+              <a:avLst>
+                <a:gd name="adj" fmla="val 0"/>
+              </a:avLst>
+            </a:prstGeom>
+            <a:noFill/>
+            <a:ln w="38100">
+              <a:solidFill>
+                <a:schemeClr val="accent4">
+                  <a:lumMod val="40000"/>
+                  <a:lumOff val="60000"/>
+                </a:schemeClr>
+              </a:solidFill>
+            </a:ln>
+          </p:spPr>
+          <p:style>
+            <a:lnRef idx="2">
+              <a:schemeClr val="accent1">
+                <a:shade val="15000"/>
+              </a:schemeClr>
+            </a:lnRef>
+            <a:fillRef idx="1">
+              <a:schemeClr val="accent1"/>
+            </a:fillRef>
+            <a:effectRef idx="0">
+              <a:schemeClr val="accent1"/>
+            </a:effectRef>
+            <a:fontRef idx="minor">
+              <a:schemeClr val="lt1"/>
+            </a:fontRef>
+          </p:style>
+          <p:txBody>
+            <a:bodyPr rtlCol="0" anchor="ctr"/>
+            <a:lstStyle/>
+            <a:p>
+              <a:pPr algn="ctr"/>
+              <a:r>
+                <a:rPr lang="en-US" sz="3200" dirty="0">
+                  <a:solidFill>
+                    <a:schemeClr val="accent4">
+                      <a:lumMod val="40000"/>
+                      <a:lumOff val="60000"/>
+                    </a:schemeClr>
+                  </a:solidFill>
+                </a:rPr>
+                <a:t>5</a:t>
+              </a:r>
+            </a:p>
+          </p:txBody>
+        </p:sp>
+        <p:sp>
+          <p:nvSpPr>
+            <p:cNvPr id="14" name="Rounded Rectangle 13">
+              <a:extLst>
+                <a:ext uri="{FF2B5EF4-FFF2-40B4-BE49-F238E27FC236}">
+                  <a16:creationId xmlns:a16="http://schemas.microsoft.com/office/drawing/2014/main" id="{0119D5E1-9C10-4BDF-47F2-CBE20E314518}"/>
+                </a:ext>
+              </a:extLst>
+            </p:cNvPr>
+            <p:cNvSpPr>
+              <a:spLocks noChangeAspect="1"/>
+            </p:cNvSpPr>
+            <p:nvPr/>
+          </p:nvSpPr>
+          <p:spPr>
+            <a:xfrm>
+              <a:off x="4100029" y="4663852"/>
+              <a:ext cx="1097280" cy="1097280"/>
+            </a:xfrm>
+            <a:prstGeom prst="roundRect">
+              <a:avLst>
+                <a:gd name="adj" fmla="val 0"/>
+              </a:avLst>
+            </a:prstGeom>
+            <a:noFill/>
+            <a:ln w="38100">
+              <a:solidFill>
+                <a:schemeClr val="accent4">
+                  <a:lumMod val="40000"/>
+                  <a:lumOff val="60000"/>
+                </a:schemeClr>
+              </a:solidFill>
+            </a:ln>
+          </p:spPr>
+          <p:style>
+            <a:lnRef idx="2">
+              <a:schemeClr val="accent1">
+                <a:shade val="15000"/>
+              </a:schemeClr>
+            </a:lnRef>
+            <a:fillRef idx="1">
+              <a:schemeClr val="accent1"/>
+            </a:fillRef>
+            <a:effectRef idx="0">
+              <a:schemeClr val="accent1"/>
+            </a:effectRef>
+            <a:fontRef idx="minor">
+              <a:schemeClr val="lt1"/>
+            </a:fontRef>
+          </p:style>
+          <p:txBody>
+            <a:bodyPr rtlCol="0" anchor="ctr"/>
+            <a:lstStyle/>
+            <a:p>
+              <a:pPr algn="ctr"/>
+              <a:r>
+                <a:rPr lang="en-US" sz="3200" dirty="0">
+                  <a:solidFill>
+                    <a:schemeClr val="accent4">
+                      <a:lumMod val="40000"/>
+                      <a:lumOff val="60000"/>
+                    </a:schemeClr>
+                  </a:solidFill>
+                </a:rPr>
+                <a:t>6</a:t>
+              </a:r>
+            </a:p>
+          </p:txBody>
+        </p:sp>
+        <p:sp>
+          <p:nvSpPr>
+            <p:cNvPr id="17" name="Rounded Rectangle 16">
+              <a:extLst>
+                <a:ext uri="{FF2B5EF4-FFF2-40B4-BE49-F238E27FC236}">
+                  <a16:creationId xmlns:a16="http://schemas.microsoft.com/office/drawing/2014/main" id="{5DD7C510-7AE9-86AF-0640-391C39C6DEB2}"/>
+                </a:ext>
+              </a:extLst>
+            </p:cNvPr>
+            <p:cNvSpPr>
+              <a:spLocks noChangeAspect="1"/>
+            </p:cNvSpPr>
+            <p:nvPr/>
+          </p:nvSpPr>
+          <p:spPr>
+            <a:xfrm>
+              <a:off x="5398901" y="4663852"/>
+              <a:ext cx="1097280" cy="1097280"/>
+            </a:xfrm>
+            <a:prstGeom prst="roundRect">
+              <a:avLst>
+                <a:gd name="adj" fmla="val 0"/>
+              </a:avLst>
+            </a:prstGeom>
+            <a:noFill/>
+            <a:ln w="38100">
+              <a:solidFill>
+                <a:schemeClr val="accent4">
+                  <a:lumMod val="40000"/>
+                  <a:lumOff val="60000"/>
+                </a:schemeClr>
+              </a:solidFill>
+            </a:ln>
+          </p:spPr>
+          <p:style>
+            <a:lnRef idx="2">
+              <a:schemeClr val="accent1">
+                <a:shade val="15000"/>
+              </a:schemeClr>
+            </a:lnRef>
+            <a:fillRef idx="1">
+              <a:schemeClr val="accent1"/>
+            </a:fillRef>
+            <a:effectRef idx="0">
+              <a:schemeClr val="accent1"/>
+            </a:effectRef>
+            <a:fontRef idx="minor">
+              <a:schemeClr val="lt1"/>
+            </a:fontRef>
+          </p:style>
+          <p:txBody>
+            <a:bodyPr rtlCol="0" anchor="ctr"/>
+            <a:lstStyle/>
+            <a:p>
+              <a:pPr algn="ctr"/>
+              <a:r>
+                <a:rPr lang="en-US" sz="3200" dirty="0">
+                  <a:solidFill>
+                    <a:schemeClr val="accent4">
+                      <a:lumMod val="40000"/>
+                      <a:lumOff val="60000"/>
+                    </a:schemeClr>
+                  </a:solidFill>
+                </a:rPr>
+                <a:t>7</a:t>
+              </a:r>
+            </a:p>
+          </p:txBody>
+        </p:sp>
+        <p:sp>
+          <p:nvSpPr>
+            <p:cNvPr id="18" name="Rounded Rectangle 17">
+              <a:extLst>
+                <a:ext uri="{FF2B5EF4-FFF2-40B4-BE49-F238E27FC236}">
+                  <a16:creationId xmlns:a16="http://schemas.microsoft.com/office/drawing/2014/main" id="{657D32F1-A909-7672-8529-00E39C4A2DC9}"/>
+                </a:ext>
+              </a:extLst>
+            </p:cNvPr>
+            <p:cNvSpPr>
+              <a:spLocks noChangeAspect="1"/>
+            </p:cNvSpPr>
+            <p:nvPr/>
+          </p:nvSpPr>
+          <p:spPr>
+            <a:xfrm>
+              <a:off x="6697773" y="4663852"/>
+              <a:ext cx="1097280" cy="1097280"/>
+            </a:xfrm>
+            <a:prstGeom prst="roundRect">
+              <a:avLst>
+                <a:gd name="adj" fmla="val 0"/>
+              </a:avLst>
+            </a:prstGeom>
+            <a:noFill/>
+            <a:ln w="38100">
+              <a:solidFill>
+                <a:schemeClr val="accent4">
+                  <a:lumMod val="40000"/>
+                  <a:lumOff val="60000"/>
+                </a:schemeClr>
+              </a:solidFill>
+            </a:ln>
+          </p:spPr>
+          <p:style>
+            <a:lnRef idx="2">
+              <a:schemeClr val="accent1">
+                <a:shade val="15000"/>
+              </a:schemeClr>
+            </a:lnRef>
+            <a:fillRef idx="1">
+              <a:schemeClr val="accent1"/>
+            </a:fillRef>
+            <a:effectRef idx="0">
+              <a:schemeClr val="accent1"/>
+            </a:effectRef>
+            <a:fontRef idx="minor">
+              <a:schemeClr val="lt1"/>
+            </a:fontRef>
+          </p:style>
+          <p:txBody>
+            <a:bodyPr rtlCol="0" anchor="ctr"/>
+            <a:lstStyle/>
+            <a:p>
+              <a:pPr algn="ctr"/>
+              <a:r>
+                <a:rPr lang="en-US" sz="3200" dirty="0">
+                  <a:solidFill>
+                    <a:schemeClr val="accent4">
+                      <a:lumMod val="40000"/>
+                      <a:lumOff val="60000"/>
+                    </a:schemeClr>
+                  </a:solidFill>
+                </a:rPr>
+                <a:t>8</a:t>
+              </a:r>
+            </a:p>
+          </p:txBody>
+        </p:sp>
+        <p:sp>
+          <p:nvSpPr>
+            <p:cNvPr id="19" name="Rounded Rectangle 18">
+              <a:extLst>
+                <a:ext uri="{FF2B5EF4-FFF2-40B4-BE49-F238E27FC236}">
+                  <a16:creationId xmlns:a16="http://schemas.microsoft.com/office/drawing/2014/main" id="{77D2F1AF-E349-696F-FE96-B140EE13B4B5}"/>
+                </a:ext>
+              </a:extLst>
+            </p:cNvPr>
+            <p:cNvSpPr>
+              <a:spLocks noChangeAspect="1"/>
+            </p:cNvSpPr>
+            <p:nvPr/>
+          </p:nvSpPr>
+          <p:spPr>
+            <a:xfrm>
+              <a:off x="5398901" y="3444378"/>
+              <a:ext cx="1097280" cy="1097280"/>
+            </a:xfrm>
+            <a:prstGeom prst="roundRect">
+              <a:avLst>
+                <a:gd name="adj" fmla="val 0"/>
+              </a:avLst>
+            </a:prstGeom>
+            <a:noFill/>
+            <a:ln w="38100">
+              <a:solidFill>
+                <a:srgbClr val="FF0000">
+                  <a:alpha val="70022"/>
+                </a:srgbClr>
+              </a:solidFill>
+            </a:ln>
+          </p:spPr>
+          <p:style>
+            <a:lnRef idx="2">
+              <a:schemeClr val="accent1">
+                <a:shade val="15000"/>
+              </a:schemeClr>
+            </a:lnRef>
+            <a:fillRef idx="1">
+              <a:schemeClr val="accent1"/>
+            </a:fillRef>
+            <a:effectRef idx="0">
+              <a:schemeClr val="accent1"/>
+            </a:effectRef>
+            <a:fontRef idx="minor">
+              <a:schemeClr val="lt1"/>
+            </a:fontRef>
+          </p:style>
+          <p:txBody>
+            <a:bodyPr rtlCol="0" anchor="ctr"/>
+            <a:lstStyle/>
+            <a:p>
+              <a:pPr algn="ctr"/>
+              <a:endParaRPr lang="en-US" sz="3200" dirty="0">
+                <a:solidFill>
+                  <a:schemeClr val="accent4">
+                    <a:lumMod val="40000"/>
+                    <a:lumOff val="60000"/>
+                  </a:schemeClr>
+                </a:solidFill>
+              </a:endParaRPr>
+            </a:p>
+          </p:txBody>
+        </p:sp>
+      </p:grpSp>
+    </p:spTree>
+    <p:extLst>
+      <p:ext uri="{BB962C8B-B14F-4D97-AF65-F5344CB8AC3E}">
+        <p14:creationId xmlns:p14="http://schemas.microsoft.com/office/powerpoint/2010/main" val="1592561747"/>
       </p:ext>
     </p:extLst>
   </p:cSld>

--- a/docs/mutli-modal.pptx
+++ b/docs/mutli-modal.pptx
@@ -8,6 +8,7 @@
     <p:sldId id="256" r:id="rId2"/>
     <p:sldId id="257" r:id="rId3"/>
     <p:sldId id="258" r:id="rId4"/>
+    <p:sldId id="259" r:id="rId5"/>
   </p:sldIdLst>
   <p:sldSz cx="12192000" cy="6858000"/>
   <p:notesSz cx="6858000" cy="9144000"/>
@@ -117,13 +118,156 @@
 <file path=ppt/revisionInfo.xml><?xml version="1.0" encoding="utf-8"?>
 <p1510:revInfo xmlns:a="http://schemas.openxmlformats.org/drawingml/2006/main" xmlns:r="http://schemas.openxmlformats.org/officeDocument/2006/relationships" xmlns:p1510="http://schemas.microsoft.com/office/powerpoint/2015/10/main">
   <p1510:revLst>
-    <p1510:client id="{3A4F8A34-488B-F940-94F3-DAA1CBB4F4E1}" v="18" dt="2024-06-05T06:11:23.671"/>
+    <p1510:client id="{AB39651A-1BF5-BA49-9005-EB61AB68D037}" v="38" dt="2024-12-08T22:11:39.935"/>
   </p1510:revLst>
 </p1510:revInfo>
 </file>
 
 <file path=ppt/changesInfos/changesInfo1.xml><?xml version="1.0" encoding="utf-8"?>
 <pc:chgInfo xmlns:a="http://schemas.openxmlformats.org/drawingml/2006/main" xmlns:r="http://schemas.openxmlformats.org/officeDocument/2006/relationships" xmlns:ac="http://schemas.microsoft.com/office/drawing/2013/main/command" xmlns:pc="http://schemas.microsoft.com/office/powerpoint/2013/main/command">
+  <pc:docChgLst>
+    <pc:chgData name="Ziyang Chen" userId="1924be8fb255cdff" providerId="LiveId" clId="{AB39651A-1BF5-BA49-9005-EB61AB68D037}"/>
+    <pc:docChg chg="undo custSel addSld modSld">
+      <pc:chgData name="Ziyang Chen" userId="1924be8fb255cdff" providerId="LiveId" clId="{AB39651A-1BF5-BA49-9005-EB61AB68D037}" dt="2024-12-08T22:15:14.003" v="183" actId="164"/>
+      <pc:docMkLst>
+        <pc:docMk/>
+      </pc:docMkLst>
+      <pc:sldChg chg="modSp mod">
+        <pc:chgData name="Ziyang Chen" userId="1924be8fb255cdff" providerId="LiveId" clId="{AB39651A-1BF5-BA49-9005-EB61AB68D037}" dt="2024-12-08T22:10:48.574" v="147" actId="1076"/>
+        <pc:sldMkLst>
+          <pc:docMk/>
+          <pc:sldMk cId="3926679691" sldId="257"/>
+        </pc:sldMkLst>
+        <pc:grpChg chg="mod">
+          <ac:chgData name="Ziyang Chen" userId="1924be8fb255cdff" providerId="LiveId" clId="{AB39651A-1BF5-BA49-9005-EB61AB68D037}" dt="2024-12-08T22:10:48.574" v="147" actId="1076"/>
+          <ac:grpSpMkLst>
+            <pc:docMk/>
+            <pc:sldMk cId="3926679691" sldId="257"/>
+            <ac:grpSpMk id="10" creationId="{C817B538-77FB-3F2B-6EE4-57B3FAB67926}"/>
+          </ac:grpSpMkLst>
+        </pc:grpChg>
+        <pc:picChg chg="mod">
+          <ac:chgData name="Ziyang Chen" userId="1924be8fb255cdff" providerId="LiveId" clId="{AB39651A-1BF5-BA49-9005-EB61AB68D037}" dt="2024-12-08T21:54:16.004" v="1" actId="1076"/>
+          <ac:picMkLst>
+            <pc:docMk/>
+            <pc:sldMk cId="3926679691" sldId="257"/>
+            <ac:picMk id="8" creationId="{D438DE9E-7527-AFA6-1396-4F014C0A273D}"/>
+          </ac:picMkLst>
+        </pc:picChg>
+      </pc:sldChg>
+      <pc:sldChg chg="addSp delSp modSp new mod">
+        <pc:chgData name="Ziyang Chen" userId="1924be8fb255cdff" providerId="LiveId" clId="{AB39651A-1BF5-BA49-9005-EB61AB68D037}" dt="2024-12-08T22:15:14.003" v="183" actId="164"/>
+        <pc:sldMkLst>
+          <pc:docMk/>
+          <pc:sldMk cId="1933315930" sldId="259"/>
+        </pc:sldMkLst>
+        <pc:spChg chg="del">
+          <ac:chgData name="Ziyang Chen" userId="1924be8fb255cdff" providerId="LiveId" clId="{AB39651A-1BF5-BA49-9005-EB61AB68D037}" dt="2024-12-08T21:54:27.492" v="4" actId="478"/>
+          <ac:spMkLst>
+            <pc:docMk/>
+            <pc:sldMk cId="1933315930" sldId="259"/>
+            <ac:spMk id="2" creationId="{8043B6EF-9B68-A441-7EA4-562D0D5ACBAA}"/>
+          </ac:spMkLst>
+        </pc:spChg>
+        <pc:spChg chg="del">
+          <ac:chgData name="Ziyang Chen" userId="1924be8fb255cdff" providerId="LiveId" clId="{AB39651A-1BF5-BA49-9005-EB61AB68D037}" dt="2024-12-08T21:54:26.379" v="3" actId="478"/>
+          <ac:spMkLst>
+            <pc:docMk/>
+            <pc:sldMk cId="1933315930" sldId="259"/>
+            <ac:spMk id="3" creationId="{0D8B6668-048C-A16E-4EA4-D5637FD74CE2}"/>
+          </ac:spMkLst>
+        </pc:spChg>
+        <pc:spChg chg="add mod">
+          <ac:chgData name="Ziyang Chen" userId="1924be8fb255cdff" providerId="LiveId" clId="{AB39651A-1BF5-BA49-9005-EB61AB68D037}" dt="2024-12-08T22:06:08.573" v="126" actId="692"/>
+          <ac:spMkLst>
+            <pc:docMk/>
+            <pc:sldMk cId="1933315930" sldId="259"/>
+            <ac:spMk id="4" creationId="{8E259C46-6B44-9974-358F-6BD30872C6E0}"/>
+          </ac:spMkLst>
+        </pc:spChg>
+        <pc:spChg chg="add mod">
+          <ac:chgData name="Ziyang Chen" userId="1924be8fb255cdff" providerId="LiveId" clId="{AB39651A-1BF5-BA49-9005-EB61AB68D037}" dt="2024-12-08T22:06:08.573" v="126" actId="692"/>
+          <ac:spMkLst>
+            <pc:docMk/>
+            <pc:sldMk cId="1933315930" sldId="259"/>
+            <ac:spMk id="5" creationId="{5E8F26F1-2D82-D950-F344-1D87858BAC26}"/>
+          </ac:spMkLst>
+        </pc:spChg>
+        <pc:spChg chg="add mod">
+          <ac:chgData name="Ziyang Chen" userId="1924be8fb255cdff" providerId="LiveId" clId="{AB39651A-1BF5-BA49-9005-EB61AB68D037}" dt="2024-12-08T22:06:08.573" v="126" actId="692"/>
+          <ac:spMkLst>
+            <pc:docMk/>
+            <pc:sldMk cId="1933315930" sldId="259"/>
+            <ac:spMk id="6" creationId="{37745DC9-8701-16D8-3324-30E726F648DD}"/>
+          </ac:spMkLst>
+        </pc:spChg>
+        <pc:spChg chg="add mod">
+          <ac:chgData name="Ziyang Chen" userId="1924be8fb255cdff" providerId="LiveId" clId="{AB39651A-1BF5-BA49-9005-EB61AB68D037}" dt="2024-12-08T22:08:58.548" v="136" actId="1076"/>
+          <ac:spMkLst>
+            <pc:docMk/>
+            <pc:sldMk cId="1933315930" sldId="259"/>
+            <ac:spMk id="9" creationId="{90B2EA2A-986B-420C-86FC-86E583AADEC8}"/>
+          </ac:spMkLst>
+        </pc:spChg>
+        <pc:spChg chg="add del mod">
+          <ac:chgData name="Ziyang Chen" userId="1924be8fb255cdff" providerId="LiveId" clId="{AB39651A-1BF5-BA49-9005-EB61AB68D037}" dt="2024-12-08T22:10:35.724" v="146" actId="478"/>
+          <ac:spMkLst>
+            <pc:docMk/>
+            <pc:sldMk cId="1933315930" sldId="259"/>
+            <ac:spMk id="10" creationId="{7EF3D8A7-6680-C4F4-81E3-14574425F220}"/>
+          </ac:spMkLst>
+        </pc:spChg>
+        <pc:grpChg chg="add mod topLvl">
+          <ac:chgData name="Ziyang Chen" userId="1924be8fb255cdff" providerId="LiveId" clId="{AB39651A-1BF5-BA49-9005-EB61AB68D037}" dt="2024-12-08T22:14:46.565" v="178" actId="14100"/>
+          <ac:grpSpMkLst>
+            <pc:docMk/>
+            <pc:sldMk cId="1933315930" sldId="259"/>
+            <ac:grpSpMk id="7" creationId="{02DDA0D2-5EA9-C206-5DCA-34BE07994F7D}"/>
+          </ac:grpSpMkLst>
+        </pc:grpChg>
+        <pc:grpChg chg="add del">
+          <ac:chgData name="Ziyang Chen" userId="1924be8fb255cdff" providerId="LiveId" clId="{AB39651A-1BF5-BA49-9005-EB61AB68D037}" dt="2024-12-08T22:14:20.312" v="167" actId="165"/>
+          <ac:grpSpMkLst>
+            <pc:docMk/>
+            <pc:sldMk cId="1933315930" sldId="259"/>
+            <ac:grpSpMk id="12" creationId="{88F822C0-6FC9-CABA-4C8F-BF1EDD5F9F1B}"/>
+          </ac:grpSpMkLst>
+        </pc:grpChg>
+        <pc:grpChg chg="add">
+          <ac:chgData name="Ziyang Chen" userId="1924be8fb255cdff" providerId="LiveId" clId="{AB39651A-1BF5-BA49-9005-EB61AB68D037}" dt="2024-12-08T22:15:14.003" v="183" actId="164"/>
+          <ac:grpSpMkLst>
+            <pc:docMk/>
+            <pc:sldMk cId="1933315930" sldId="259"/>
+            <ac:grpSpMk id="13" creationId="{1BED37E3-7A2C-5EFA-1FAC-A14EE729AA69}"/>
+          </ac:grpSpMkLst>
+        </pc:grpChg>
+        <pc:picChg chg="add mod topLvl">
+          <ac:chgData name="Ziyang Chen" userId="1924be8fb255cdff" providerId="LiveId" clId="{AB39651A-1BF5-BA49-9005-EB61AB68D037}" dt="2024-12-08T22:15:07.444" v="182" actId="1076"/>
+          <ac:picMkLst>
+            <pc:docMk/>
+            <pc:sldMk cId="1933315930" sldId="259"/>
+            <ac:picMk id="8" creationId="{8D4E1A4F-7921-4A4D-7A76-FA94081C06B1}"/>
+          </ac:picMkLst>
+        </pc:picChg>
+        <pc:picChg chg="add mod topLvl">
+          <ac:chgData name="Ziyang Chen" userId="1924be8fb255cdff" providerId="LiveId" clId="{AB39651A-1BF5-BA49-9005-EB61AB68D037}" dt="2024-12-08T22:15:03.395" v="181" actId="1076"/>
+          <ac:picMkLst>
+            <pc:docMk/>
+            <pc:sldMk cId="1933315930" sldId="259"/>
+            <ac:picMk id="11" creationId="{7881FB6D-25A7-B710-43E4-B0A9D78063F4}"/>
+          </ac:picMkLst>
+        </pc:picChg>
+        <pc:picChg chg="add del mod">
+          <ac:chgData name="Ziyang Chen" userId="1924be8fb255cdff" providerId="LiveId" clId="{AB39651A-1BF5-BA49-9005-EB61AB68D037}" dt="2024-12-08T22:09:47.862" v="143" actId="478"/>
+          <ac:picMkLst>
+            <pc:docMk/>
+            <pc:sldMk cId="1933315930" sldId="259"/>
+            <ac:picMk id="1025" creationId="{A8A6C756-FB20-86E7-A517-DBE8ADC08CBC}"/>
+          </ac:picMkLst>
+        </pc:picChg>
+      </pc:sldChg>
+    </pc:docChg>
+  </pc:docChgLst>
   <pc:docChgLst>
     <pc:chgData name="Ziyang Chen" userId="1924be8fb255cdff" providerId="LiveId" clId="{3A4F8A34-488B-F940-94F3-DAA1CBB4F4E1}"/>
     <pc:docChg chg="undo custSel addSld modSld">
@@ -137,14 +281,6 @@
           <pc:docMk/>
           <pc:sldMk cId="3926679691" sldId="257"/>
         </pc:sldMkLst>
-        <pc:grpChg chg="mod">
-          <ac:chgData name="Ziyang Chen" userId="1924be8fb255cdff" providerId="LiveId" clId="{3A4F8A34-488B-F940-94F3-DAA1CBB4F4E1}" dt="2024-06-05T06:01:21.164" v="0" actId="1076"/>
-          <ac:grpSpMkLst>
-            <pc:docMk/>
-            <pc:sldMk cId="3926679691" sldId="257"/>
-            <ac:grpSpMk id="10" creationId="{C817B538-77FB-3F2B-6EE4-57B3FAB67926}"/>
-          </ac:grpSpMkLst>
-        </pc:grpChg>
       </pc:sldChg>
       <pc:sldChg chg="addSp delSp modSp new mod">
         <pc:chgData name="Ziyang Chen" userId="1924be8fb255cdff" providerId="LiveId" clId="{3A4F8A34-488B-F940-94F3-DAA1CBB4F4E1}" dt="2024-06-05T06:11:23.670" v="219" actId="164"/>
@@ -152,150 +288,6 @@
           <pc:docMk/>
           <pc:sldMk cId="1592561747" sldId="258"/>
         </pc:sldMkLst>
-        <pc:spChg chg="del">
-          <ac:chgData name="Ziyang Chen" userId="1924be8fb255cdff" providerId="LiveId" clId="{3A4F8A34-488B-F940-94F3-DAA1CBB4F4E1}" dt="2024-06-05T06:01:46.285" v="3" actId="478"/>
-          <ac:spMkLst>
-            <pc:docMk/>
-            <pc:sldMk cId="1592561747" sldId="258"/>
-            <ac:spMk id="2" creationId="{B93465B5-9912-CA1C-1044-795504AC3632}"/>
-          </ac:spMkLst>
-        </pc:spChg>
-        <pc:spChg chg="del">
-          <ac:chgData name="Ziyang Chen" userId="1924be8fb255cdff" providerId="LiveId" clId="{3A4F8A34-488B-F940-94F3-DAA1CBB4F4E1}" dt="2024-06-05T06:01:45.559" v="2" actId="478"/>
-          <ac:spMkLst>
-            <pc:docMk/>
-            <pc:sldMk cId="1592561747" sldId="258"/>
-            <ac:spMk id="3" creationId="{0790C7B5-C1D9-84FE-2CD7-1F25A86DBE96}"/>
-          </ac:spMkLst>
-        </pc:spChg>
-        <pc:spChg chg="add mod">
-          <ac:chgData name="Ziyang Chen" userId="1924be8fb255cdff" providerId="LiveId" clId="{3A4F8A34-488B-F940-94F3-DAA1CBB4F4E1}" dt="2024-06-05T06:11:23.670" v="219" actId="164"/>
-          <ac:spMkLst>
-            <pc:docMk/>
-            <pc:sldMk cId="1592561747" sldId="258"/>
-            <ac:spMk id="6" creationId="{0D6A5281-B939-557E-4814-8EE6141D12D0}"/>
-          </ac:spMkLst>
-        </pc:spChg>
-        <pc:spChg chg="add mod">
-          <ac:chgData name="Ziyang Chen" userId="1924be8fb255cdff" providerId="LiveId" clId="{3A4F8A34-488B-F940-94F3-DAA1CBB4F4E1}" dt="2024-06-05T06:05:38.564" v="39" actId="767"/>
-          <ac:spMkLst>
-            <pc:docMk/>
-            <pc:sldMk cId="1592561747" sldId="258"/>
-            <ac:spMk id="7" creationId="{9EFE1CD1-AD3A-842E-998C-EB580E7FCDF6}"/>
-          </ac:spMkLst>
-        </pc:spChg>
-        <pc:spChg chg="add mod">
-          <ac:chgData name="Ziyang Chen" userId="1924be8fb255cdff" providerId="LiveId" clId="{3A4F8A34-488B-F940-94F3-DAA1CBB4F4E1}" dt="2024-06-05T06:05:38.188" v="38" actId="767"/>
-          <ac:spMkLst>
-            <pc:docMk/>
-            <pc:sldMk cId="1592561747" sldId="258"/>
-            <ac:spMk id="8" creationId="{A3358C39-8257-3EC3-8234-0417C2D6F8D0}"/>
-          </ac:spMkLst>
-        </pc:spChg>
-        <pc:spChg chg="add mod">
-          <ac:chgData name="Ziyang Chen" userId="1924be8fb255cdff" providerId="LiveId" clId="{3A4F8A34-488B-F940-94F3-DAA1CBB4F4E1}" dt="2024-06-05T06:05:40.570" v="41" actId="767"/>
-          <ac:spMkLst>
-            <pc:docMk/>
-            <pc:sldMk cId="1592561747" sldId="258"/>
-            <ac:spMk id="9" creationId="{1AE0C487-D6D9-D74E-8218-D52288CEFCD8}"/>
-          </ac:spMkLst>
-        </pc:spChg>
-        <pc:spChg chg="add mod">
-          <ac:chgData name="Ziyang Chen" userId="1924be8fb255cdff" providerId="LiveId" clId="{3A4F8A34-488B-F940-94F3-DAA1CBB4F4E1}" dt="2024-06-05T06:11:23.670" v="219" actId="164"/>
-          <ac:spMkLst>
-            <pc:docMk/>
-            <pc:sldMk cId="1592561747" sldId="258"/>
-            <ac:spMk id="10" creationId="{39841A8A-0B28-4FFC-9A2E-93FB0FE905B3}"/>
-          </ac:spMkLst>
-        </pc:spChg>
-        <pc:spChg chg="add mod">
-          <ac:chgData name="Ziyang Chen" userId="1924be8fb255cdff" providerId="LiveId" clId="{3A4F8A34-488B-F940-94F3-DAA1CBB4F4E1}" dt="2024-06-05T06:11:23.670" v="219" actId="164"/>
-          <ac:spMkLst>
-            <pc:docMk/>
-            <pc:sldMk cId="1592561747" sldId="258"/>
-            <ac:spMk id="11" creationId="{D8474605-BD38-8F12-EC15-7C0FCB621310}"/>
-          </ac:spMkLst>
-        </pc:spChg>
-        <pc:spChg chg="add mod">
-          <ac:chgData name="Ziyang Chen" userId="1924be8fb255cdff" providerId="LiveId" clId="{3A4F8A34-488B-F940-94F3-DAA1CBB4F4E1}" dt="2024-06-05T06:11:23.670" v="219" actId="164"/>
-          <ac:spMkLst>
-            <pc:docMk/>
-            <pc:sldMk cId="1592561747" sldId="258"/>
-            <ac:spMk id="12" creationId="{A9C6F751-8FD6-C05C-F91F-776ABE57CFD7}"/>
-          </ac:spMkLst>
-        </pc:spChg>
-        <pc:spChg chg="add mod">
-          <ac:chgData name="Ziyang Chen" userId="1924be8fb255cdff" providerId="LiveId" clId="{3A4F8A34-488B-F940-94F3-DAA1CBB4F4E1}" dt="2024-06-05T06:11:23.670" v="219" actId="164"/>
-          <ac:spMkLst>
-            <pc:docMk/>
-            <pc:sldMk cId="1592561747" sldId="258"/>
-            <ac:spMk id="13" creationId="{A9FF722E-C9ED-E584-A4BC-CB7749B66588}"/>
-          </ac:spMkLst>
-        </pc:spChg>
-        <pc:spChg chg="add mod">
-          <ac:chgData name="Ziyang Chen" userId="1924be8fb255cdff" providerId="LiveId" clId="{3A4F8A34-488B-F940-94F3-DAA1CBB4F4E1}" dt="2024-06-05T06:11:23.670" v="219" actId="164"/>
-          <ac:spMkLst>
-            <pc:docMk/>
-            <pc:sldMk cId="1592561747" sldId="258"/>
-            <ac:spMk id="14" creationId="{0119D5E1-9C10-4BDF-47F2-CBE20E314518}"/>
-          </ac:spMkLst>
-        </pc:spChg>
-        <pc:spChg chg="add mod">
-          <ac:chgData name="Ziyang Chen" userId="1924be8fb255cdff" providerId="LiveId" clId="{3A4F8A34-488B-F940-94F3-DAA1CBB4F4E1}" dt="2024-06-05T06:09:33.129" v="81"/>
-          <ac:spMkLst>
-            <pc:docMk/>
-            <pc:sldMk cId="1592561747" sldId="258"/>
-            <ac:spMk id="16" creationId="{78C5FC1A-0CA5-BD39-6F72-65BF8361A5C6}"/>
-          </ac:spMkLst>
-        </pc:spChg>
-        <pc:spChg chg="add mod">
-          <ac:chgData name="Ziyang Chen" userId="1924be8fb255cdff" providerId="LiveId" clId="{3A4F8A34-488B-F940-94F3-DAA1CBB4F4E1}" dt="2024-06-05T06:11:23.670" v="219" actId="164"/>
-          <ac:spMkLst>
-            <pc:docMk/>
-            <pc:sldMk cId="1592561747" sldId="258"/>
-            <ac:spMk id="17" creationId="{5DD7C510-7AE9-86AF-0640-391C39C6DEB2}"/>
-          </ac:spMkLst>
-        </pc:spChg>
-        <pc:spChg chg="add mod">
-          <ac:chgData name="Ziyang Chen" userId="1924be8fb255cdff" providerId="LiveId" clId="{3A4F8A34-488B-F940-94F3-DAA1CBB4F4E1}" dt="2024-06-05T06:11:23.670" v="219" actId="164"/>
-          <ac:spMkLst>
-            <pc:docMk/>
-            <pc:sldMk cId="1592561747" sldId="258"/>
-            <ac:spMk id="18" creationId="{657D32F1-A909-7672-8529-00E39C4A2DC9}"/>
-          </ac:spMkLst>
-        </pc:spChg>
-        <pc:spChg chg="add mod">
-          <ac:chgData name="Ziyang Chen" userId="1924be8fb255cdff" providerId="LiveId" clId="{3A4F8A34-488B-F940-94F3-DAA1CBB4F4E1}" dt="2024-06-05T06:11:23.670" v="219" actId="164"/>
-          <ac:spMkLst>
-            <pc:docMk/>
-            <pc:sldMk cId="1592561747" sldId="258"/>
-            <ac:spMk id="19" creationId="{77D2F1AF-E349-696F-FE96-B140EE13B4B5}"/>
-          </ac:spMkLst>
-        </pc:spChg>
-        <pc:grpChg chg="add mod">
-          <ac:chgData name="Ziyang Chen" userId="1924be8fb255cdff" providerId="LiveId" clId="{3A4F8A34-488B-F940-94F3-DAA1CBB4F4E1}" dt="2024-06-05T06:11:23.670" v="219" actId="164"/>
-          <ac:grpSpMkLst>
-            <pc:docMk/>
-            <pc:sldMk cId="1592561747" sldId="258"/>
-            <ac:grpSpMk id="20" creationId="{A9D108F0-63A6-BD8F-37F5-CB1056DD6AC9}"/>
-          </ac:grpSpMkLst>
-        </pc:grpChg>
-        <pc:picChg chg="add mod">
-          <ac:chgData name="Ziyang Chen" userId="1924be8fb255cdff" providerId="LiveId" clId="{3A4F8A34-488B-F940-94F3-DAA1CBB4F4E1}" dt="2024-06-05T06:11:23.670" v="219" actId="164"/>
-          <ac:picMkLst>
-            <pc:docMk/>
-            <pc:sldMk cId="1592561747" sldId="258"/>
-            <ac:picMk id="5" creationId="{0391296F-529D-B915-9EA7-FFA2CBA256E9}"/>
-          </ac:picMkLst>
-        </pc:picChg>
-        <pc:picChg chg="add mod">
-          <ac:chgData name="Ziyang Chen" userId="1924be8fb255cdff" providerId="LiveId" clId="{3A4F8A34-488B-F940-94F3-DAA1CBB4F4E1}" dt="2024-06-05T06:09:33.129" v="81"/>
-          <ac:picMkLst>
-            <pc:docMk/>
-            <pc:sldMk cId="1592561747" sldId="258"/>
-            <ac:picMk id="15" creationId="{AC8E6C30-B577-9318-A965-7237738754EB}"/>
-          </ac:picMkLst>
-        </pc:picChg>
       </pc:sldChg>
     </pc:docChg>
   </pc:docChgLst>
@@ -312,150 +304,6 @@
           <pc:docMk/>
           <pc:sldMk cId="3545581277" sldId="256"/>
         </pc:sldMkLst>
-        <pc:spChg chg="del">
-          <ac:chgData name="Chen, Ziyang" userId="b9969a22-7821-4ff2-b1dd-470ec11815fe" providerId="ADAL" clId="{5F62FE2B-DE30-464F-BC57-6DCAA9A7790B}" dt="2023-11-20T02:19:20.989" v="1" actId="478"/>
-          <ac:spMkLst>
-            <pc:docMk/>
-            <pc:sldMk cId="3545581277" sldId="256"/>
-            <ac:spMk id="2" creationId="{153D995D-A814-7B39-9F82-950180252169}"/>
-          </ac:spMkLst>
-        </pc:spChg>
-        <pc:spChg chg="del">
-          <ac:chgData name="Chen, Ziyang" userId="b9969a22-7821-4ff2-b1dd-470ec11815fe" providerId="ADAL" clId="{5F62FE2B-DE30-464F-BC57-6DCAA9A7790B}" dt="2023-11-20T02:19:21.992" v="2" actId="478"/>
-          <ac:spMkLst>
-            <pc:docMk/>
-            <pc:sldMk cId="3545581277" sldId="256"/>
-            <ac:spMk id="3" creationId="{00C5FFF9-DF87-F46F-BBA0-A7FAD12613FE}"/>
-          </ac:spMkLst>
-        </pc:spChg>
-        <pc:spChg chg="add mod topLvl">
-          <ac:chgData name="Chen, Ziyang" userId="b9969a22-7821-4ff2-b1dd-470ec11815fe" providerId="ADAL" clId="{5F62FE2B-DE30-464F-BC57-6DCAA9A7790B}" dt="2023-11-20T02:40:06.314" v="239" actId="338"/>
-          <ac:spMkLst>
-            <pc:docMk/>
-            <pc:sldMk cId="3545581277" sldId="256"/>
-            <ac:spMk id="14" creationId="{45D4D87D-A5C4-28BE-7B62-2DD4E513BAC4}"/>
-          </ac:spMkLst>
-        </pc:spChg>
-        <pc:spChg chg="add mod topLvl">
-          <ac:chgData name="Chen, Ziyang" userId="b9969a22-7821-4ff2-b1dd-470ec11815fe" providerId="ADAL" clId="{5F62FE2B-DE30-464F-BC57-6DCAA9A7790B}" dt="2023-11-20T02:40:06.314" v="239" actId="338"/>
-          <ac:spMkLst>
-            <pc:docMk/>
-            <pc:sldMk cId="3545581277" sldId="256"/>
-            <ac:spMk id="15" creationId="{B2C4C3DB-B28B-5955-AAAE-AF2683C3D3E3}"/>
-          </ac:spMkLst>
-        </pc:spChg>
-        <pc:spChg chg="add mod topLvl">
-          <ac:chgData name="Chen, Ziyang" userId="b9969a22-7821-4ff2-b1dd-470ec11815fe" providerId="ADAL" clId="{5F62FE2B-DE30-464F-BC57-6DCAA9A7790B}" dt="2023-11-20T02:40:06.314" v="239" actId="338"/>
-          <ac:spMkLst>
-            <pc:docMk/>
-            <pc:sldMk cId="3545581277" sldId="256"/>
-            <ac:spMk id="16" creationId="{7CEE6805-5413-B7C9-822D-4A4952433587}"/>
-          </ac:spMkLst>
-        </pc:spChg>
-        <pc:spChg chg="add mod topLvl">
-          <ac:chgData name="Chen, Ziyang" userId="b9969a22-7821-4ff2-b1dd-470ec11815fe" providerId="ADAL" clId="{5F62FE2B-DE30-464F-BC57-6DCAA9A7790B}" dt="2023-11-20T02:40:06.314" v="239" actId="338"/>
-          <ac:spMkLst>
-            <pc:docMk/>
-            <pc:sldMk cId="3545581277" sldId="256"/>
-            <ac:spMk id="17" creationId="{D2CE772C-37DC-9601-1E2A-D65BE7495403}"/>
-          </ac:spMkLst>
-        </pc:spChg>
-        <pc:spChg chg="add del mod ord">
-          <ac:chgData name="Chen, Ziyang" userId="b9969a22-7821-4ff2-b1dd-470ec11815fe" providerId="ADAL" clId="{5F62FE2B-DE30-464F-BC57-6DCAA9A7790B}" dt="2023-11-20T02:39:09.831" v="231" actId="478"/>
-          <ac:spMkLst>
-            <pc:docMk/>
-            <pc:sldMk cId="3545581277" sldId="256"/>
-            <ac:spMk id="19" creationId="{342337F2-1F16-6052-CEB7-1746C20AF36A}"/>
-          </ac:spMkLst>
-        </pc:spChg>
-        <pc:spChg chg="add mod ord">
-          <ac:chgData name="Chen, Ziyang" userId="b9969a22-7821-4ff2-b1dd-470ec11815fe" providerId="ADAL" clId="{5F62FE2B-DE30-464F-BC57-6DCAA9A7790B}" dt="2023-11-20T03:15:17.890" v="320" actId="164"/>
-          <ac:spMkLst>
-            <pc:docMk/>
-            <pc:sldMk cId="3545581277" sldId="256"/>
-            <ac:spMk id="22" creationId="{9A497A28-7E3A-C41A-7039-279CCB331272}"/>
-          </ac:spMkLst>
-        </pc:spChg>
-        <pc:grpChg chg="add del mod">
-          <ac:chgData name="Chen, Ziyang" userId="b9969a22-7821-4ff2-b1dd-470ec11815fe" providerId="ADAL" clId="{5F62FE2B-DE30-464F-BC57-6DCAA9A7790B}" dt="2023-11-20T02:37:09.988" v="171" actId="165"/>
-          <ac:grpSpMkLst>
-            <pc:docMk/>
-            <pc:sldMk cId="3545581277" sldId="256"/>
-            <ac:grpSpMk id="18" creationId="{3A6FAFD5-3283-4DEB-D736-E6D67C33ECF7}"/>
-          </ac:grpSpMkLst>
-        </pc:grpChg>
-        <pc:grpChg chg="add del mod">
-          <ac:chgData name="Chen, Ziyang" userId="b9969a22-7821-4ff2-b1dd-470ec11815fe" providerId="ADAL" clId="{5F62FE2B-DE30-464F-BC57-6DCAA9A7790B}" dt="2023-11-20T02:39:43.429" v="236" actId="165"/>
-          <ac:grpSpMkLst>
-            <pc:docMk/>
-            <pc:sldMk cId="3545581277" sldId="256"/>
-            <ac:grpSpMk id="20" creationId="{1E2DC43D-07DE-A28B-7379-D8429EEF1B47}"/>
-          </ac:grpSpMkLst>
-        </pc:grpChg>
-        <pc:grpChg chg="add mod">
-          <ac:chgData name="Chen, Ziyang" userId="b9969a22-7821-4ff2-b1dd-470ec11815fe" providerId="ADAL" clId="{5F62FE2B-DE30-464F-BC57-6DCAA9A7790B}" dt="2023-11-20T03:15:17.890" v="320" actId="164"/>
-          <ac:grpSpMkLst>
-            <pc:docMk/>
-            <pc:sldMk cId="3545581277" sldId="256"/>
-            <ac:grpSpMk id="21" creationId="{E0C01F52-AAF9-3BBC-C028-4F09B1CF335C}"/>
-          </ac:grpSpMkLst>
-        </pc:grpChg>
-        <pc:grpChg chg="add mod">
-          <ac:chgData name="Chen, Ziyang" userId="b9969a22-7821-4ff2-b1dd-470ec11815fe" providerId="ADAL" clId="{5F62FE2B-DE30-464F-BC57-6DCAA9A7790B}" dt="2023-11-20T03:15:17.890" v="320" actId="164"/>
-          <ac:grpSpMkLst>
-            <pc:docMk/>
-            <pc:sldMk cId="3545581277" sldId="256"/>
-            <ac:grpSpMk id="23" creationId="{296608AD-2689-0689-BB9F-11AFA90AE7FD}"/>
-          </ac:grpSpMkLst>
-        </pc:grpChg>
-        <pc:picChg chg="add del mod">
-          <ac:chgData name="Chen, Ziyang" userId="b9969a22-7821-4ff2-b1dd-470ec11815fe" providerId="ADAL" clId="{5F62FE2B-DE30-464F-BC57-6DCAA9A7790B}" dt="2023-11-20T02:36:38.588" v="166" actId="478"/>
-          <ac:picMkLst>
-            <pc:docMk/>
-            <pc:sldMk cId="3545581277" sldId="256"/>
-            <ac:picMk id="3" creationId="{DD30DF8E-A2D1-280F-D207-93A3202962C3}"/>
-          </ac:picMkLst>
-        </pc:picChg>
-        <pc:picChg chg="add del mod">
-          <ac:chgData name="Chen, Ziyang" userId="b9969a22-7821-4ff2-b1dd-470ec11815fe" providerId="ADAL" clId="{5F62FE2B-DE30-464F-BC57-6DCAA9A7790B}" dt="2023-11-20T02:27:23.058" v="40" actId="478"/>
-          <ac:picMkLst>
-            <pc:docMk/>
-            <pc:sldMk cId="3545581277" sldId="256"/>
-            <ac:picMk id="5" creationId="{BD97D230-2660-78F9-1E11-07EFD62A8DD4}"/>
-          </ac:picMkLst>
-        </pc:picChg>
-        <pc:picChg chg="add mod topLvl">
-          <ac:chgData name="Chen, Ziyang" userId="b9969a22-7821-4ff2-b1dd-470ec11815fe" providerId="ADAL" clId="{5F62FE2B-DE30-464F-BC57-6DCAA9A7790B}" dt="2023-11-20T02:40:06.314" v="239" actId="338"/>
-          <ac:picMkLst>
-            <pc:docMk/>
-            <pc:sldMk cId="3545581277" sldId="256"/>
-            <ac:picMk id="7" creationId="{04D17B69-C39A-8553-7226-CF046E56020E}"/>
-          </ac:picMkLst>
-        </pc:picChg>
-        <pc:picChg chg="add mod topLvl">
-          <ac:chgData name="Chen, Ziyang" userId="b9969a22-7821-4ff2-b1dd-470ec11815fe" providerId="ADAL" clId="{5F62FE2B-DE30-464F-BC57-6DCAA9A7790B}" dt="2023-11-20T02:40:06.314" v="239" actId="338"/>
-          <ac:picMkLst>
-            <pc:docMk/>
-            <pc:sldMk cId="3545581277" sldId="256"/>
-            <ac:picMk id="9" creationId="{950D35CB-7337-1263-C248-B518B6BA5F4B}"/>
-          </ac:picMkLst>
-        </pc:picChg>
-        <pc:picChg chg="add mod topLvl">
-          <ac:chgData name="Chen, Ziyang" userId="b9969a22-7821-4ff2-b1dd-470ec11815fe" providerId="ADAL" clId="{5F62FE2B-DE30-464F-BC57-6DCAA9A7790B}" dt="2023-11-20T02:40:06.314" v="239" actId="338"/>
-          <ac:picMkLst>
-            <pc:docMk/>
-            <pc:sldMk cId="3545581277" sldId="256"/>
-            <ac:picMk id="11" creationId="{583197CB-2E27-643D-CBF9-D91852E76C5F}"/>
-          </ac:picMkLst>
-        </pc:picChg>
-        <pc:picChg chg="add mod topLvl">
-          <ac:chgData name="Chen, Ziyang" userId="b9969a22-7821-4ff2-b1dd-470ec11815fe" providerId="ADAL" clId="{5F62FE2B-DE30-464F-BC57-6DCAA9A7790B}" dt="2023-11-20T02:40:06.314" v="239" actId="338"/>
-          <ac:picMkLst>
-            <pc:docMk/>
-            <pc:sldMk cId="3545581277" sldId="256"/>
-            <ac:picMk id="13" creationId="{12381C1C-E521-7391-002D-9DB0A2DE0026}"/>
-          </ac:picMkLst>
-        </pc:picChg>
       </pc:sldChg>
       <pc:sldChg chg="addSp delSp modSp new mod setBg">
         <pc:chgData name="Chen, Ziyang" userId="b9969a22-7821-4ff2-b1dd-470ec11815fe" providerId="ADAL" clId="{5F62FE2B-DE30-464F-BC57-6DCAA9A7790B}" dt="2023-11-20T03:07:28.132" v="308" actId="164"/>
@@ -463,70 +311,6 @@
           <pc:docMk/>
           <pc:sldMk cId="3926679691" sldId="257"/>
         </pc:sldMkLst>
-        <pc:spChg chg="del">
-          <ac:chgData name="Chen, Ziyang" userId="b9969a22-7821-4ff2-b1dd-470ec11815fe" providerId="ADAL" clId="{5F62FE2B-DE30-464F-BC57-6DCAA9A7790B}" dt="2023-11-20T03:01:37.763" v="242" actId="478"/>
-          <ac:spMkLst>
-            <pc:docMk/>
-            <pc:sldMk cId="3926679691" sldId="257"/>
-            <ac:spMk id="2" creationId="{28AD927C-87E8-CEA2-5F4A-C134A53C4553}"/>
-          </ac:spMkLst>
-        </pc:spChg>
-        <pc:spChg chg="del">
-          <ac:chgData name="Chen, Ziyang" userId="b9969a22-7821-4ff2-b1dd-470ec11815fe" providerId="ADAL" clId="{5F62FE2B-DE30-464F-BC57-6DCAA9A7790B}" dt="2023-11-20T03:01:35.960" v="241" actId="478"/>
-          <ac:spMkLst>
-            <pc:docMk/>
-            <pc:sldMk cId="3926679691" sldId="257"/>
-            <ac:spMk id="3" creationId="{1786E114-6769-ED11-070A-5DE3784DF179}"/>
-          </ac:spMkLst>
-        </pc:spChg>
-        <pc:spChg chg="add del">
-          <ac:chgData name="Chen, Ziyang" userId="b9969a22-7821-4ff2-b1dd-470ec11815fe" providerId="ADAL" clId="{5F62FE2B-DE30-464F-BC57-6DCAA9A7790B}" dt="2023-11-20T03:01:40.782" v="244" actId="478"/>
-          <ac:spMkLst>
-            <pc:docMk/>
-            <pc:sldMk cId="3926679691" sldId="257"/>
-            <ac:spMk id="4" creationId="{66D84F42-CFA7-ED66-2D16-68E7E6D3653D}"/>
-          </ac:spMkLst>
-        </pc:spChg>
-        <pc:spChg chg="add del">
-          <ac:chgData name="Chen, Ziyang" userId="b9969a22-7821-4ff2-b1dd-470ec11815fe" providerId="ADAL" clId="{5F62FE2B-DE30-464F-BC57-6DCAA9A7790B}" dt="2023-11-20T03:01:50.148" v="246"/>
-          <ac:spMkLst>
-            <pc:docMk/>
-            <pc:sldMk cId="3926679691" sldId="257"/>
-            <ac:spMk id="5" creationId="{33896CB8-7E95-1B82-568C-53000AB055B0}"/>
-          </ac:spMkLst>
-        </pc:spChg>
-        <pc:spChg chg="add del mod">
-          <ac:chgData name="Chen, Ziyang" userId="b9969a22-7821-4ff2-b1dd-470ec11815fe" providerId="ADAL" clId="{5F62FE2B-DE30-464F-BC57-6DCAA9A7790B}" dt="2023-11-20T03:03:51.589" v="249" actId="478"/>
-          <ac:spMkLst>
-            <pc:docMk/>
-            <pc:sldMk cId="3926679691" sldId="257"/>
-            <ac:spMk id="6" creationId="{1A5E9A8D-0567-E49E-AA22-B22A7ECF4682}"/>
-          </ac:spMkLst>
-        </pc:spChg>
-        <pc:spChg chg="add mod ord">
-          <ac:chgData name="Chen, Ziyang" userId="b9969a22-7821-4ff2-b1dd-470ec11815fe" providerId="ADAL" clId="{5F62FE2B-DE30-464F-BC57-6DCAA9A7790B}" dt="2023-11-20T03:07:28.132" v="308" actId="164"/>
-          <ac:spMkLst>
-            <pc:docMk/>
-            <pc:sldMk cId="3926679691" sldId="257"/>
-            <ac:spMk id="9" creationId="{F99A972D-21C9-B91A-8B98-48BE297CFF3F}"/>
-          </ac:spMkLst>
-        </pc:spChg>
-        <pc:grpChg chg="add mod">
-          <ac:chgData name="Chen, Ziyang" userId="b9969a22-7821-4ff2-b1dd-470ec11815fe" providerId="ADAL" clId="{5F62FE2B-DE30-464F-BC57-6DCAA9A7790B}" dt="2023-11-20T03:07:28.132" v="308" actId="164"/>
-          <ac:grpSpMkLst>
-            <pc:docMk/>
-            <pc:sldMk cId="3926679691" sldId="257"/>
-            <ac:grpSpMk id="10" creationId="{C817B538-77FB-3F2B-6EE4-57B3FAB67926}"/>
-          </ac:grpSpMkLst>
-        </pc:grpChg>
-        <pc:picChg chg="add mod">
-          <ac:chgData name="Chen, Ziyang" userId="b9969a22-7821-4ff2-b1dd-470ec11815fe" providerId="ADAL" clId="{5F62FE2B-DE30-464F-BC57-6DCAA9A7790B}" dt="2023-11-20T03:07:28.132" v="308" actId="164"/>
-          <ac:picMkLst>
-            <pc:docMk/>
-            <pc:sldMk cId="3926679691" sldId="257"/>
-            <ac:picMk id="8" creationId="{D438DE9E-7527-AFA6-1396-4F014C0A273D}"/>
-          </ac:picMkLst>
-        </pc:picChg>
       </pc:sldChg>
     </pc:docChg>
   </pc:docChgLst>
@@ -682,7 +466,7 @@
           <a:p>
             <a:fld id="{3FEC199F-4198-4061-A48E-45842FC1156B}" type="datetimeFigureOut">
               <a:rPr lang="en-US" smtClean="0"/>
-              <a:t>6/4/24</a:t>
+              <a:t>12/8/24</a:t>
             </a:fld>
             <a:endParaRPr lang="en-US"/>
           </a:p>
@@ -882,7 +666,7 @@
           <a:p>
             <a:fld id="{3FEC199F-4198-4061-A48E-45842FC1156B}" type="datetimeFigureOut">
               <a:rPr lang="en-US" smtClean="0"/>
-              <a:t>6/4/24</a:t>
+              <a:t>12/8/24</a:t>
             </a:fld>
             <a:endParaRPr lang="en-US"/>
           </a:p>
@@ -1092,7 +876,7 @@
           <a:p>
             <a:fld id="{3FEC199F-4198-4061-A48E-45842FC1156B}" type="datetimeFigureOut">
               <a:rPr lang="en-US" smtClean="0"/>
-              <a:t>6/4/24</a:t>
+              <a:t>12/8/24</a:t>
             </a:fld>
             <a:endParaRPr lang="en-US"/>
           </a:p>
@@ -1292,7 +1076,7 @@
           <a:p>
             <a:fld id="{3FEC199F-4198-4061-A48E-45842FC1156B}" type="datetimeFigureOut">
               <a:rPr lang="en-US" smtClean="0"/>
-              <a:t>6/4/24</a:t>
+              <a:t>12/8/24</a:t>
             </a:fld>
             <a:endParaRPr lang="en-US"/>
           </a:p>
@@ -1568,7 +1352,7 @@
           <a:p>
             <a:fld id="{3FEC199F-4198-4061-A48E-45842FC1156B}" type="datetimeFigureOut">
               <a:rPr lang="en-US" smtClean="0"/>
-              <a:t>6/4/24</a:t>
+              <a:t>12/8/24</a:t>
             </a:fld>
             <a:endParaRPr lang="en-US"/>
           </a:p>
@@ -1836,7 +1620,7 @@
           <a:p>
             <a:fld id="{3FEC199F-4198-4061-A48E-45842FC1156B}" type="datetimeFigureOut">
               <a:rPr lang="en-US" smtClean="0"/>
-              <a:t>6/4/24</a:t>
+              <a:t>12/8/24</a:t>
             </a:fld>
             <a:endParaRPr lang="en-US"/>
           </a:p>
@@ -2251,7 +2035,7 @@
           <a:p>
             <a:fld id="{3FEC199F-4198-4061-A48E-45842FC1156B}" type="datetimeFigureOut">
               <a:rPr lang="en-US" smtClean="0"/>
-              <a:t>6/4/24</a:t>
+              <a:t>12/8/24</a:t>
             </a:fld>
             <a:endParaRPr lang="en-US"/>
           </a:p>
@@ -2393,7 +2177,7 @@
           <a:p>
             <a:fld id="{3FEC199F-4198-4061-A48E-45842FC1156B}" type="datetimeFigureOut">
               <a:rPr lang="en-US" smtClean="0"/>
-              <a:t>6/4/24</a:t>
+              <a:t>12/8/24</a:t>
             </a:fld>
             <a:endParaRPr lang="en-US"/>
           </a:p>
@@ -2506,7 +2290,7 @@
           <a:p>
             <a:fld id="{3FEC199F-4198-4061-A48E-45842FC1156B}" type="datetimeFigureOut">
               <a:rPr lang="en-US" smtClean="0"/>
-              <a:t>6/4/24</a:t>
+              <a:t>12/8/24</a:t>
             </a:fld>
             <a:endParaRPr lang="en-US"/>
           </a:p>
@@ -2819,7 +2603,7 @@
           <a:p>
             <a:fld id="{3FEC199F-4198-4061-A48E-45842FC1156B}" type="datetimeFigureOut">
               <a:rPr lang="en-US" smtClean="0"/>
-              <a:t>6/4/24</a:t>
+              <a:t>12/8/24</a:t>
             </a:fld>
             <a:endParaRPr lang="en-US"/>
           </a:p>
@@ -3108,7 +2892,7 @@
           <a:p>
             <a:fld id="{3FEC199F-4198-4061-A48E-45842FC1156B}" type="datetimeFigureOut">
               <a:rPr lang="en-US" smtClean="0"/>
-              <a:t>6/4/24</a:t>
+              <a:t>12/8/24</a:t>
             </a:fld>
             <a:endParaRPr lang="en-US"/>
           </a:p>
@@ -3351,7 +3135,7 @@
           <a:p>
             <a:fld id="{3FEC199F-4198-4061-A48E-45842FC1156B}" type="datetimeFigureOut">
               <a:rPr lang="en-US" smtClean="0"/>
-              <a:t>6/4/24</a:t>
+              <a:t>12/8/24</a:t>
             </a:fld>
             <a:endParaRPr lang="en-US"/>
           </a:p>
@@ -4182,7 +3966,7 @@
         </p:nvGrpSpPr>
         <p:grpSpPr>
           <a:xfrm>
-            <a:off x="2050494" y="1303038"/>
+            <a:off x="4104925" y="1291163"/>
             <a:ext cx="2743200" cy="2729023"/>
             <a:chOff x="7095460" y="1502734"/>
             <a:chExt cx="2743200" cy="2729023"/>
@@ -5000,6 +4784,420 @@
 </p:sld>
 </file>
 
+<file path=ppt/slides/slide4.xml><?xml version="1.0" encoding="utf-8"?>
+<p:sld xmlns:a="http://schemas.openxmlformats.org/drawingml/2006/main" xmlns:r="http://schemas.openxmlformats.org/officeDocument/2006/relationships" xmlns:p="http://schemas.openxmlformats.org/presentationml/2006/main">
+  <p:cSld>
+    <p:spTree>
+      <p:nvGrpSpPr>
+        <p:cNvPr id="1" name=""/>
+        <p:cNvGrpSpPr/>
+        <p:nvPr/>
+      </p:nvGrpSpPr>
+      <p:grpSpPr>
+        <a:xfrm>
+          <a:off x="0" y="0"/>
+          <a:ext cx="0" cy="0"/>
+          <a:chOff x="0" y="0"/>
+          <a:chExt cx="0" cy="0"/>
+        </a:xfrm>
+      </p:grpSpPr>
+      <p:sp>
+        <p:nvSpPr>
+          <p:cNvPr id="9" name="Rectangle 2">
+            <a:extLst>
+              <a:ext uri="{FF2B5EF4-FFF2-40B4-BE49-F238E27FC236}">
+                <a16:creationId xmlns:a16="http://schemas.microsoft.com/office/drawing/2014/main" id="{90B2EA2A-986B-420C-86FC-86E583AADEC8}"/>
+              </a:ext>
+            </a:extLst>
+          </p:cNvPr>
+          <p:cNvSpPr>
+            <a:spLocks noChangeArrowheads="1"/>
+          </p:cNvSpPr>
+          <p:nvPr/>
+        </p:nvSpPr>
+        <p:spPr bwMode="auto">
+          <a:xfrm>
+            <a:off x="666751" y="-3327315"/>
+            <a:ext cx="3451266" cy="507831"/>
+          </a:xfrm>
+          <a:prstGeom prst="rect">
+            <a:avLst/>
+          </a:prstGeom>
+          <a:noFill/>
+          <a:ln>
+            <a:noFill/>
+          </a:ln>
+          <a:effectLst/>
+          <a:extLst>
+            <a:ext uri="{909E8E84-426E-40DD-AFC4-6F175D3DCCD1}">
+              <a14:hiddenFill xmlns:a14="http://schemas.microsoft.com/office/drawing/2010/main">
+                <a:solidFill>
+                  <a:schemeClr val="accent1"/>
+                </a:solidFill>
+              </a14:hiddenFill>
+            </a:ext>
+            <a:ext uri="{91240B29-F687-4F45-9708-019B960494DF}">
+              <a14:hiddenLine xmlns:a14="http://schemas.microsoft.com/office/drawing/2010/main" w="9525">
+                <a:solidFill>
+                  <a:schemeClr val="tx1"/>
+                </a:solidFill>
+                <a:miter lim="800000"/>
+                <a:headEnd/>
+                <a:tailEnd/>
+              </a14:hiddenLine>
+            </a:ext>
+            <a:ext uri="{AF507438-7753-43E0-B8FC-AC1667EBCBE1}">
+              <a14:hiddenEffects xmlns:a14="http://schemas.microsoft.com/office/drawing/2010/main">
+                <a:effectLst>
+                  <a:outerShdw dist="35921" dir="2700000" algn="ctr" rotWithShape="0">
+                    <a:schemeClr val="bg2"/>
+                  </a:outerShdw>
+                </a:effectLst>
+              </a14:hiddenEffects>
+            </a:ext>
+          </a:extLst>
+        </p:spPr>
+        <p:txBody>
+          <a:bodyPr vert="horz" wrap="square" lIns="91440" tIns="45720" rIns="91440" bIns="45720" numCol="1" anchor="ctr" anchorCtr="0" compatLnSpc="1">
+            <a:prstTxWarp prst="textNoShape">
+              <a:avLst/>
+            </a:prstTxWarp>
+            <a:spAutoFit/>
+          </a:bodyPr>
+          <a:lstStyle/>
+          <a:p>
+            <a:pPr marL="0" marR="0" lvl="0" indent="0" algn="ctr" defTabSz="914400" rtl="0" eaLnBrk="0" fontAlgn="base" latinLnBrk="0" hangingPunct="0">
+              <a:lnSpc>
+                <a:spcPct val="100000"/>
+              </a:lnSpc>
+              <a:spcBef>
+                <a:spcPct val="0"/>
+              </a:spcBef>
+              <a:spcAft>
+                <a:spcPct val="0"/>
+              </a:spcAft>
+              <a:buClrTx/>
+              <a:buSzTx/>
+              <a:buFontTx/>
+              <a:buNone/>
+              <a:tabLst/>
+            </a:pPr>
+            <a:br>
+              <a:rPr kumimoji="0" lang="en-US" altLang="en-US" sz="900" b="0" i="0" u="none" strike="noStrike" cap="none" normalizeH="0" baseline="0">
+                <a:ln>
+                  <a:noFill/>
+                </a:ln>
+                <a:solidFill>
+                  <a:srgbClr val="000000"/>
+                </a:solidFill>
+                <a:effectLst/>
+                <a:latin typeface="Arial" panose="020B0604020202020204" pitchFamily="34" charset="0"/>
+                <a:ea typeface="ArbeitMedium"/>
+              </a:rPr>
+            </a:br>
+            <a:endParaRPr kumimoji="0" lang="en-US" altLang="en-US" sz="1800" b="0" i="0" u="none" strike="noStrike" cap="none" normalizeH="0" baseline="0">
+              <a:ln>
+                <a:noFill/>
+              </a:ln>
+              <a:solidFill>
+                <a:schemeClr val="tx1"/>
+              </a:solidFill>
+              <a:effectLst/>
+              <a:latin typeface="Arial" panose="020B0604020202020204" pitchFamily="34" charset="0"/>
+            </a:endParaRPr>
+          </a:p>
+        </p:txBody>
+      </p:sp>
+      <p:grpSp>
+        <p:nvGrpSpPr>
+          <p:cNvPr id="13" name="Group 12">
+            <a:extLst>
+              <a:ext uri="{FF2B5EF4-FFF2-40B4-BE49-F238E27FC236}">
+                <a16:creationId xmlns:a16="http://schemas.microsoft.com/office/drawing/2014/main" id="{1BED37E3-7A2C-5EFA-1FAC-A14EE729AA69}"/>
+              </a:ext>
+            </a:extLst>
+          </p:cNvPr>
+          <p:cNvGrpSpPr/>
+          <p:nvPr/>
+        </p:nvGrpSpPr>
+        <p:grpSpPr>
+          <a:xfrm>
+            <a:off x="3788229" y="546266"/>
+            <a:ext cx="2006930" cy="2006930"/>
+            <a:chOff x="3788229" y="546266"/>
+            <a:chExt cx="2006930" cy="2006930"/>
+          </a:xfrm>
+        </p:grpSpPr>
+        <p:grpSp>
+          <p:nvGrpSpPr>
+            <p:cNvPr id="7" name="Group 6">
+              <a:extLst>
+                <a:ext uri="{FF2B5EF4-FFF2-40B4-BE49-F238E27FC236}">
+                  <a16:creationId xmlns:a16="http://schemas.microsoft.com/office/drawing/2014/main" id="{02DDA0D2-5EA9-C206-5DCA-34BE07994F7D}"/>
+                </a:ext>
+              </a:extLst>
+            </p:cNvPr>
+            <p:cNvGrpSpPr/>
+            <p:nvPr/>
+          </p:nvGrpSpPr>
+          <p:grpSpPr>
+            <a:xfrm>
+              <a:off x="3788229" y="546266"/>
+              <a:ext cx="2006930" cy="2006930"/>
+              <a:chOff x="3764478" y="2375065"/>
+              <a:chExt cx="1710047" cy="1710047"/>
+            </a:xfrm>
+            <a:scene3d>
+              <a:camera prst="isometricOffAxis1Top"/>
+              <a:lightRig rig="threePt" dir="t"/>
+            </a:scene3d>
+          </p:grpSpPr>
+          <p:sp>
+            <p:nvSpPr>
+              <p:cNvPr id="4" name="Oval 3">
+                <a:extLst>
+                  <a:ext uri="{FF2B5EF4-FFF2-40B4-BE49-F238E27FC236}">
+                    <a16:creationId xmlns:a16="http://schemas.microsoft.com/office/drawing/2014/main" id="{8E259C46-6B44-9974-358F-6BD30872C6E0}"/>
+                  </a:ext>
+                </a:extLst>
+              </p:cNvPr>
+              <p:cNvSpPr/>
+              <p:nvPr/>
+            </p:nvSpPr>
+            <p:spPr>
+              <a:xfrm>
+                <a:off x="3764478" y="2375065"/>
+                <a:ext cx="1710047" cy="1710047"/>
+              </a:xfrm>
+              <a:prstGeom prst="ellipse">
+                <a:avLst/>
+              </a:prstGeom>
+              <a:noFill/>
+              <a:ln w="38100" cap="rnd">
+                <a:solidFill>
+                  <a:schemeClr val="tx1">
+                    <a:alpha val="20228"/>
+                  </a:schemeClr>
+                </a:solidFill>
+                <a:round/>
+              </a:ln>
+            </p:spPr>
+            <p:style>
+              <a:lnRef idx="2">
+                <a:schemeClr val="accent1">
+                  <a:shade val="15000"/>
+                </a:schemeClr>
+              </a:lnRef>
+              <a:fillRef idx="1">
+                <a:schemeClr val="accent1"/>
+              </a:fillRef>
+              <a:effectRef idx="0">
+                <a:schemeClr val="accent1"/>
+              </a:effectRef>
+              <a:fontRef idx="minor">
+                <a:schemeClr val="lt1"/>
+              </a:fontRef>
+            </p:style>
+            <p:txBody>
+              <a:bodyPr rtlCol="0" anchor="ctr"/>
+              <a:lstStyle/>
+              <a:p>
+                <a:pPr algn="ctr"/>
+                <a:endParaRPr lang="en-US">
+                  <a:noFill/>
+                </a:endParaRPr>
+              </a:p>
+            </p:txBody>
+          </p:sp>
+          <p:sp>
+            <p:nvSpPr>
+              <p:cNvPr id="5" name="Oval 4">
+                <a:extLst>
+                  <a:ext uri="{FF2B5EF4-FFF2-40B4-BE49-F238E27FC236}">
+                    <a16:creationId xmlns:a16="http://schemas.microsoft.com/office/drawing/2014/main" id="{5E8F26F1-2D82-D950-F344-1D87858BAC26}"/>
+                  </a:ext>
+                </a:extLst>
+              </p:cNvPr>
+              <p:cNvSpPr/>
+              <p:nvPr/>
+            </p:nvSpPr>
+            <p:spPr>
+              <a:xfrm>
+                <a:off x="3916878" y="2527465"/>
+                <a:ext cx="1403267" cy="1403267"/>
+              </a:xfrm>
+              <a:prstGeom prst="ellipse">
+                <a:avLst/>
+              </a:prstGeom>
+              <a:noFill/>
+              <a:ln w="38100" cap="rnd">
+                <a:solidFill>
+                  <a:schemeClr val="tx1">
+                    <a:alpha val="20228"/>
+                  </a:schemeClr>
+                </a:solidFill>
+                <a:round/>
+              </a:ln>
+            </p:spPr>
+            <p:style>
+              <a:lnRef idx="2">
+                <a:schemeClr val="accent1">
+                  <a:shade val="15000"/>
+                </a:schemeClr>
+              </a:lnRef>
+              <a:fillRef idx="1">
+                <a:schemeClr val="accent1"/>
+              </a:fillRef>
+              <a:effectRef idx="0">
+                <a:schemeClr val="accent1"/>
+              </a:effectRef>
+              <a:fontRef idx="minor">
+                <a:schemeClr val="lt1"/>
+              </a:fontRef>
+            </p:style>
+            <p:txBody>
+              <a:bodyPr rtlCol="0" anchor="ctr"/>
+              <a:lstStyle/>
+              <a:p>
+                <a:pPr algn="ctr"/>
+                <a:endParaRPr lang="en-US" dirty="0">
+                  <a:noFill/>
+                </a:endParaRPr>
+              </a:p>
+            </p:txBody>
+          </p:sp>
+          <p:sp>
+            <p:nvSpPr>
+              <p:cNvPr id="6" name="Oval 5">
+                <a:extLst>
+                  <a:ext uri="{FF2B5EF4-FFF2-40B4-BE49-F238E27FC236}">
+                    <a16:creationId xmlns:a16="http://schemas.microsoft.com/office/drawing/2014/main" id="{37745DC9-8701-16D8-3324-30E726F648DD}"/>
+                  </a:ext>
+                </a:extLst>
+              </p:cNvPr>
+              <p:cNvSpPr/>
+              <p:nvPr/>
+            </p:nvSpPr>
+            <p:spPr>
+              <a:xfrm>
+                <a:off x="4093029" y="2703617"/>
+                <a:ext cx="1060862" cy="1060862"/>
+              </a:xfrm>
+              <a:prstGeom prst="ellipse">
+                <a:avLst/>
+              </a:prstGeom>
+              <a:noFill/>
+              <a:ln w="38100" cap="rnd">
+                <a:solidFill>
+                  <a:schemeClr val="tx1">
+                    <a:alpha val="20228"/>
+                  </a:schemeClr>
+                </a:solidFill>
+                <a:round/>
+              </a:ln>
+            </p:spPr>
+            <p:style>
+              <a:lnRef idx="2">
+                <a:schemeClr val="accent1">
+                  <a:shade val="15000"/>
+                </a:schemeClr>
+              </a:lnRef>
+              <a:fillRef idx="1">
+                <a:schemeClr val="accent1"/>
+              </a:fillRef>
+              <a:effectRef idx="0">
+                <a:schemeClr val="accent1"/>
+              </a:effectRef>
+              <a:fontRef idx="minor">
+                <a:schemeClr val="lt1"/>
+              </a:fontRef>
+            </p:style>
+            <p:txBody>
+              <a:bodyPr rtlCol="0" anchor="ctr"/>
+              <a:lstStyle/>
+              <a:p>
+                <a:pPr algn="ctr"/>
+                <a:endParaRPr lang="en-US">
+                  <a:noFill/>
+                </a:endParaRPr>
+              </a:p>
+            </p:txBody>
+          </p:sp>
+        </p:grpSp>
+        <p:pic>
+          <p:nvPicPr>
+            <p:cNvPr id="8" name="Picture 7">
+              <a:extLst>
+                <a:ext uri="{FF2B5EF4-FFF2-40B4-BE49-F238E27FC236}">
+                  <a16:creationId xmlns:a16="http://schemas.microsoft.com/office/drawing/2014/main" id="{8D4E1A4F-7921-4A4D-7A76-FA94081C06B1}"/>
+                </a:ext>
+              </a:extLst>
+            </p:cNvPr>
+            <p:cNvPicPr>
+              <a:picLocks noChangeAspect="1"/>
+            </p:cNvPicPr>
+            <p:nvPr/>
+          </p:nvPicPr>
+          <p:blipFill>
+            <a:blip r:embed="rId2"/>
+            <a:stretch>
+              <a:fillRect/>
+            </a:stretch>
+          </p:blipFill>
+          <p:spPr>
+            <a:xfrm>
+              <a:off x="3863000" y="972279"/>
+              <a:ext cx="398787" cy="398787"/>
+            </a:xfrm>
+            <a:prstGeom prst="rect">
+              <a:avLst/>
+            </a:prstGeom>
+          </p:spPr>
+        </p:pic>
+        <p:pic>
+          <p:nvPicPr>
+            <p:cNvPr id="11" name="Picture 10">
+              <a:extLst>
+                <a:ext uri="{FF2B5EF4-FFF2-40B4-BE49-F238E27FC236}">
+                  <a16:creationId xmlns:a16="http://schemas.microsoft.com/office/drawing/2014/main" id="{7881FB6D-25A7-B710-43E4-B0A9D78063F4}"/>
+                </a:ext>
+              </a:extLst>
+            </p:cNvPr>
+            <p:cNvPicPr>
+              <a:picLocks noChangeAspect="1"/>
+            </p:cNvPicPr>
+            <p:nvPr/>
+          </p:nvPicPr>
+          <p:blipFill>
+            <a:blip r:embed="rId3"/>
+            <a:stretch>
+              <a:fillRect/>
+            </a:stretch>
+          </p:blipFill>
+          <p:spPr>
+            <a:xfrm>
+              <a:off x="4365874" y="736741"/>
+              <a:ext cx="869865" cy="869865"/>
+            </a:xfrm>
+            <a:prstGeom prst="rect">
+              <a:avLst/>
+            </a:prstGeom>
+          </p:spPr>
+        </p:pic>
+      </p:grpSp>
+    </p:spTree>
+    <p:extLst>
+      <p:ext uri="{BB962C8B-B14F-4D97-AF65-F5344CB8AC3E}">
+        <p14:creationId xmlns:p14="http://schemas.microsoft.com/office/powerpoint/2010/main" val="1933315930"/>
+      </p:ext>
+    </p:extLst>
+  </p:cSld>
+  <p:clrMapOvr>
+    <a:masterClrMapping/>
+  </p:clrMapOvr>
+</p:sld>
+</file>
+
 <file path=ppt/theme/theme1.xml><?xml version="1.0" encoding="utf-8"?>
 <a:theme xmlns:a="http://schemas.openxmlformats.org/drawingml/2006/main" name="Office 主题​​">
   <a:themeElements>

--- a/docs/mutli-modal.pptx
+++ b/docs/mutli-modal.pptx
@@ -6,9 +6,11 @@
   </p:sldMasterIdLst>
   <p:sldIdLst>
     <p:sldId id="256" r:id="rId2"/>
-    <p:sldId id="257" r:id="rId3"/>
-    <p:sldId id="258" r:id="rId4"/>
-    <p:sldId id="259" r:id="rId5"/>
+    <p:sldId id="260" r:id="rId3"/>
+    <p:sldId id="261" r:id="rId4"/>
+    <p:sldId id="257" r:id="rId5"/>
+    <p:sldId id="258" r:id="rId6"/>
+    <p:sldId id="259" r:id="rId7"/>
   </p:sldIdLst>
   <p:sldSz cx="12192000" cy="6858000"/>
   <p:notesSz cx="6858000" cy="9144000"/>
@@ -118,7 +120,7 @@
 <file path=ppt/revisionInfo.xml><?xml version="1.0" encoding="utf-8"?>
 <p1510:revInfo xmlns:a="http://schemas.openxmlformats.org/drawingml/2006/main" xmlns:r="http://schemas.openxmlformats.org/officeDocument/2006/relationships" xmlns:p1510="http://schemas.microsoft.com/office/powerpoint/2015/10/main">
   <p1510:revLst>
-    <p1510:client id="{AB39651A-1BF5-BA49-9005-EB61AB68D037}" v="38" dt="2024-12-08T22:11:39.935"/>
+    <p1510:client id="{7ED8CE5E-C9C1-EA4A-B7F5-F18449D1C39F}" v="22" dt="2025-04-30T18:26:45.753"/>
   </p1510:revLst>
 </p1510:revInfo>
 </file>
@@ -138,22 +140,6 @@
           <pc:docMk/>
           <pc:sldMk cId="3926679691" sldId="257"/>
         </pc:sldMkLst>
-        <pc:grpChg chg="mod">
-          <ac:chgData name="Ziyang Chen" userId="1924be8fb255cdff" providerId="LiveId" clId="{AB39651A-1BF5-BA49-9005-EB61AB68D037}" dt="2024-12-08T22:10:48.574" v="147" actId="1076"/>
-          <ac:grpSpMkLst>
-            <pc:docMk/>
-            <pc:sldMk cId="3926679691" sldId="257"/>
-            <ac:grpSpMk id="10" creationId="{C817B538-77FB-3F2B-6EE4-57B3FAB67926}"/>
-          </ac:grpSpMkLst>
-        </pc:grpChg>
-        <pc:picChg chg="mod">
-          <ac:chgData name="Ziyang Chen" userId="1924be8fb255cdff" providerId="LiveId" clId="{AB39651A-1BF5-BA49-9005-EB61AB68D037}" dt="2024-12-08T21:54:16.004" v="1" actId="1076"/>
-          <ac:picMkLst>
-            <pc:docMk/>
-            <pc:sldMk cId="3926679691" sldId="257"/>
-            <ac:picMk id="8" creationId="{D438DE9E-7527-AFA6-1396-4F014C0A273D}"/>
-          </ac:picMkLst>
-        </pc:picChg>
       </pc:sldChg>
       <pc:sldChg chg="addSp delSp modSp new mod">
         <pc:chgData name="Ziyang Chen" userId="1924be8fb255cdff" providerId="LiveId" clId="{AB39651A-1BF5-BA49-9005-EB61AB68D037}" dt="2024-12-08T22:15:14.003" v="183" actId="164"/>
@@ -161,110 +147,6 @@
           <pc:docMk/>
           <pc:sldMk cId="1933315930" sldId="259"/>
         </pc:sldMkLst>
-        <pc:spChg chg="del">
-          <ac:chgData name="Ziyang Chen" userId="1924be8fb255cdff" providerId="LiveId" clId="{AB39651A-1BF5-BA49-9005-EB61AB68D037}" dt="2024-12-08T21:54:27.492" v="4" actId="478"/>
-          <ac:spMkLst>
-            <pc:docMk/>
-            <pc:sldMk cId="1933315930" sldId="259"/>
-            <ac:spMk id="2" creationId="{8043B6EF-9B68-A441-7EA4-562D0D5ACBAA}"/>
-          </ac:spMkLst>
-        </pc:spChg>
-        <pc:spChg chg="del">
-          <ac:chgData name="Ziyang Chen" userId="1924be8fb255cdff" providerId="LiveId" clId="{AB39651A-1BF5-BA49-9005-EB61AB68D037}" dt="2024-12-08T21:54:26.379" v="3" actId="478"/>
-          <ac:spMkLst>
-            <pc:docMk/>
-            <pc:sldMk cId="1933315930" sldId="259"/>
-            <ac:spMk id="3" creationId="{0D8B6668-048C-A16E-4EA4-D5637FD74CE2}"/>
-          </ac:spMkLst>
-        </pc:spChg>
-        <pc:spChg chg="add mod">
-          <ac:chgData name="Ziyang Chen" userId="1924be8fb255cdff" providerId="LiveId" clId="{AB39651A-1BF5-BA49-9005-EB61AB68D037}" dt="2024-12-08T22:06:08.573" v="126" actId="692"/>
-          <ac:spMkLst>
-            <pc:docMk/>
-            <pc:sldMk cId="1933315930" sldId="259"/>
-            <ac:spMk id="4" creationId="{8E259C46-6B44-9974-358F-6BD30872C6E0}"/>
-          </ac:spMkLst>
-        </pc:spChg>
-        <pc:spChg chg="add mod">
-          <ac:chgData name="Ziyang Chen" userId="1924be8fb255cdff" providerId="LiveId" clId="{AB39651A-1BF5-BA49-9005-EB61AB68D037}" dt="2024-12-08T22:06:08.573" v="126" actId="692"/>
-          <ac:spMkLst>
-            <pc:docMk/>
-            <pc:sldMk cId="1933315930" sldId="259"/>
-            <ac:spMk id="5" creationId="{5E8F26F1-2D82-D950-F344-1D87858BAC26}"/>
-          </ac:spMkLst>
-        </pc:spChg>
-        <pc:spChg chg="add mod">
-          <ac:chgData name="Ziyang Chen" userId="1924be8fb255cdff" providerId="LiveId" clId="{AB39651A-1BF5-BA49-9005-EB61AB68D037}" dt="2024-12-08T22:06:08.573" v="126" actId="692"/>
-          <ac:spMkLst>
-            <pc:docMk/>
-            <pc:sldMk cId="1933315930" sldId="259"/>
-            <ac:spMk id="6" creationId="{37745DC9-8701-16D8-3324-30E726F648DD}"/>
-          </ac:spMkLst>
-        </pc:spChg>
-        <pc:spChg chg="add mod">
-          <ac:chgData name="Ziyang Chen" userId="1924be8fb255cdff" providerId="LiveId" clId="{AB39651A-1BF5-BA49-9005-EB61AB68D037}" dt="2024-12-08T22:08:58.548" v="136" actId="1076"/>
-          <ac:spMkLst>
-            <pc:docMk/>
-            <pc:sldMk cId="1933315930" sldId="259"/>
-            <ac:spMk id="9" creationId="{90B2EA2A-986B-420C-86FC-86E583AADEC8}"/>
-          </ac:spMkLst>
-        </pc:spChg>
-        <pc:spChg chg="add del mod">
-          <ac:chgData name="Ziyang Chen" userId="1924be8fb255cdff" providerId="LiveId" clId="{AB39651A-1BF5-BA49-9005-EB61AB68D037}" dt="2024-12-08T22:10:35.724" v="146" actId="478"/>
-          <ac:spMkLst>
-            <pc:docMk/>
-            <pc:sldMk cId="1933315930" sldId="259"/>
-            <ac:spMk id="10" creationId="{7EF3D8A7-6680-C4F4-81E3-14574425F220}"/>
-          </ac:spMkLst>
-        </pc:spChg>
-        <pc:grpChg chg="add mod topLvl">
-          <ac:chgData name="Ziyang Chen" userId="1924be8fb255cdff" providerId="LiveId" clId="{AB39651A-1BF5-BA49-9005-EB61AB68D037}" dt="2024-12-08T22:14:46.565" v="178" actId="14100"/>
-          <ac:grpSpMkLst>
-            <pc:docMk/>
-            <pc:sldMk cId="1933315930" sldId="259"/>
-            <ac:grpSpMk id="7" creationId="{02DDA0D2-5EA9-C206-5DCA-34BE07994F7D}"/>
-          </ac:grpSpMkLst>
-        </pc:grpChg>
-        <pc:grpChg chg="add del">
-          <ac:chgData name="Ziyang Chen" userId="1924be8fb255cdff" providerId="LiveId" clId="{AB39651A-1BF5-BA49-9005-EB61AB68D037}" dt="2024-12-08T22:14:20.312" v="167" actId="165"/>
-          <ac:grpSpMkLst>
-            <pc:docMk/>
-            <pc:sldMk cId="1933315930" sldId="259"/>
-            <ac:grpSpMk id="12" creationId="{88F822C0-6FC9-CABA-4C8F-BF1EDD5F9F1B}"/>
-          </ac:grpSpMkLst>
-        </pc:grpChg>
-        <pc:grpChg chg="add">
-          <ac:chgData name="Ziyang Chen" userId="1924be8fb255cdff" providerId="LiveId" clId="{AB39651A-1BF5-BA49-9005-EB61AB68D037}" dt="2024-12-08T22:15:14.003" v="183" actId="164"/>
-          <ac:grpSpMkLst>
-            <pc:docMk/>
-            <pc:sldMk cId="1933315930" sldId="259"/>
-            <ac:grpSpMk id="13" creationId="{1BED37E3-7A2C-5EFA-1FAC-A14EE729AA69}"/>
-          </ac:grpSpMkLst>
-        </pc:grpChg>
-        <pc:picChg chg="add mod topLvl">
-          <ac:chgData name="Ziyang Chen" userId="1924be8fb255cdff" providerId="LiveId" clId="{AB39651A-1BF5-BA49-9005-EB61AB68D037}" dt="2024-12-08T22:15:07.444" v="182" actId="1076"/>
-          <ac:picMkLst>
-            <pc:docMk/>
-            <pc:sldMk cId="1933315930" sldId="259"/>
-            <ac:picMk id="8" creationId="{8D4E1A4F-7921-4A4D-7A76-FA94081C06B1}"/>
-          </ac:picMkLst>
-        </pc:picChg>
-        <pc:picChg chg="add mod topLvl">
-          <ac:chgData name="Ziyang Chen" userId="1924be8fb255cdff" providerId="LiveId" clId="{AB39651A-1BF5-BA49-9005-EB61AB68D037}" dt="2024-12-08T22:15:03.395" v="181" actId="1076"/>
-          <ac:picMkLst>
-            <pc:docMk/>
-            <pc:sldMk cId="1933315930" sldId="259"/>
-            <ac:picMk id="11" creationId="{7881FB6D-25A7-B710-43E4-B0A9D78063F4}"/>
-          </ac:picMkLst>
-        </pc:picChg>
-        <pc:picChg chg="add del mod">
-          <ac:chgData name="Ziyang Chen" userId="1924be8fb255cdff" providerId="LiveId" clId="{AB39651A-1BF5-BA49-9005-EB61AB68D037}" dt="2024-12-08T22:09:47.862" v="143" actId="478"/>
-          <ac:picMkLst>
-            <pc:docMk/>
-            <pc:sldMk cId="1933315930" sldId="259"/>
-            <ac:picMk id="1025" creationId="{A8A6C756-FB20-86E7-A517-DBE8ADC08CBC}"/>
-          </ac:picMkLst>
-        </pc:picChg>
       </pc:sldChg>
     </pc:docChg>
   </pc:docChgLst>
@@ -314,6 +196,291 @@
       </pc:sldChg>
     </pc:docChg>
   </pc:docChgLst>
+  <pc:docChgLst>
+    <pc:chgData name="Ziyang Chen" userId="1924be8fb255cdff" providerId="LiveId" clId="{7ED8CE5E-C9C1-EA4A-B7F5-F18449D1C39F}"/>
+    <pc:docChg chg="undo custSel addSld delSld modSld sldOrd">
+      <pc:chgData name="Ziyang Chen" userId="1924be8fb255cdff" providerId="LiveId" clId="{7ED8CE5E-C9C1-EA4A-B7F5-F18449D1C39F}" dt="2025-04-30T18:27:16.100" v="137" actId="164"/>
+      <pc:docMkLst>
+        <pc:docMk/>
+      </pc:docMkLst>
+      <pc:sldChg chg="addSp modSp mod">
+        <pc:chgData name="Ziyang Chen" userId="1924be8fb255cdff" providerId="LiveId" clId="{7ED8CE5E-C9C1-EA4A-B7F5-F18449D1C39F}" dt="2025-04-30T18:16:49.865" v="72" actId="1076"/>
+        <pc:sldMkLst>
+          <pc:docMk/>
+          <pc:sldMk cId="3926679691" sldId="257"/>
+        </pc:sldMkLst>
+        <pc:spChg chg="add mod">
+          <ac:chgData name="Ziyang Chen" userId="1924be8fb255cdff" providerId="LiveId" clId="{7ED8CE5E-C9C1-EA4A-B7F5-F18449D1C39F}" dt="2025-04-30T18:16:49.865" v="72" actId="1076"/>
+          <ac:spMkLst>
+            <pc:docMk/>
+            <pc:sldMk cId="3926679691" sldId="257"/>
+            <ac:spMk id="2" creationId="{EDB69301-01B0-EC6C-030B-9355E62CF5FC}"/>
+          </ac:spMkLst>
+        </pc:spChg>
+        <pc:spChg chg="mod">
+          <ac:chgData name="Ziyang Chen" userId="1924be8fb255cdff" providerId="LiveId" clId="{7ED8CE5E-C9C1-EA4A-B7F5-F18449D1C39F}" dt="2025-04-30T17:41:03.142" v="9" actId="1076"/>
+          <ac:spMkLst>
+            <pc:docMk/>
+            <pc:sldMk cId="3926679691" sldId="257"/>
+            <ac:spMk id="9" creationId="{F99A972D-21C9-B91A-8B98-48BE297CFF3F}"/>
+          </ac:spMkLst>
+        </pc:spChg>
+        <pc:picChg chg="mod">
+          <ac:chgData name="Ziyang Chen" userId="1924be8fb255cdff" providerId="LiveId" clId="{7ED8CE5E-C9C1-EA4A-B7F5-F18449D1C39F}" dt="2025-04-30T18:16:48.124" v="69" actId="1076"/>
+          <ac:picMkLst>
+            <pc:docMk/>
+            <pc:sldMk cId="3926679691" sldId="257"/>
+            <ac:picMk id="8" creationId="{D438DE9E-7527-AFA6-1396-4F014C0A273D}"/>
+          </ac:picMkLst>
+        </pc:picChg>
+      </pc:sldChg>
+      <pc:sldChg chg="addSp delSp modSp new mod ord">
+        <pc:chgData name="Ziyang Chen" userId="1924be8fb255cdff" providerId="LiveId" clId="{7ED8CE5E-C9C1-EA4A-B7F5-F18449D1C39F}" dt="2025-04-30T18:16:53.373" v="74" actId="20578"/>
+        <pc:sldMkLst>
+          <pc:docMk/>
+          <pc:sldMk cId="693965776" sldId="260"/>
+        </pc:sldMkLst>
+        <pc:spChg chg="del">
+          <ac:chgData name="Ziyang Chen" userId="1924be8fb255cdff" providerId="LiveId" clId="{7ED8CE5E-C9C1-EA4A-B7F5-F18449D1C39F}" dt="2025-04-30T17:31:51.207" v="2" actId="478"/>
+          <ac:spMkLst>
+            <pc:docMk/>
+            <pc:sldMk cId="693965776" sldId="260"/>
+            <ac:spMk id="2" creationId="{300AB32B-9F26-47A7-4C7D-3311DF9E0468}"/>
+          </ac:spMkLst>
+        </pc:spChg>
+        <pc:spChg chg="del">
+          <ac:chgData name="Ziyang Chen" userId="1924be8fb255cdff" providerId="LiveId" clId="{7ED8CE5E-C9C1-EA4A-B7F5-F18449D1C39F}" dt="2025-04-30T17:31:50.316" v="1" actId="478"/>
+          <ac:spMkLst>
+            <pc:docMk/>
+            <pc:sldMk cId="693965776" sldId="260"/>
+            <ac:spMk id="3" creationId="{D4E24022-1198-397F-1FE4-3104DF8EB977}"/>
+          </ac:spMkLst>
+        </pc:spChg>
+        <pc:spChg chg="add mod">
+          <ac:chgData name="Ziyang Chen" userId="1924be8fb255cdff" providerId="LiveId" clId="{7ED8CE5E-C9C1-EA4A-B7F5-F18449D1C39F}" dt="2025-04-30T17:49:11.297" v="22" actId="1076"/>
+          <ac:spMkLst>
+            <pc:docMk/>
+            <pc:sldMk cId="693965776" sldId="260"/>
+            <ac:spMk id="5" creationId="{33C3ED61-BFCE-934D-45C6-3FFBED63B58B}"/>
+          </ac:spMkLst>
+        </pc:spChg>
+        <pc:spChg chg="del mod topLvl">
+          <ac:chgData name="Ziyang Chen" userId="1924be8fb255cdff" providerId="LiveId" clId="{7ED8CE5E-C9C1-EA4A-B7F5-F18449D1C39F}" dt="2025-04-30T17:49:34.898" v="26" actId="478"/>
+          <ac:spMkLst>
+            <pc:docMk/>
+            <pc:sldMk cId="693965776" sldId="260"/>
+            <ac:spMk id="8" creationId="{F0C20031-90C4-8A70-5A4E-2795FA5B755D}"/>
+          </ac:spMkLst>
+        </pc:spChg>
+        <pc:spChg chg="add mod">
+          <ac:chgData name="Ziyang Chen" userId="1924be8fb255cdff" providerId="LiveId" clId="{7ED8CE5E-C9C1-EA4A-B7F5-F18449D1C39F}" dt="2025-04-30T18:06:42.779" v="59" actId="1076"/>
+          <ac:spMkLst>
+            <pc:docMk/>
+            <pc:sldMk cId="693965776" sldId="260"/>
+            <ac:spMk id="10" creationId="{DA80ADD2-12CA-23B1-494F-6C4388C77FEF}"/>
+          </ac:spMkLst>
+        </pc:spChg>
+        <pc:grpChg chg="add del mod">
+          <ac:chgData name="Ziyang Chen" userId="1924be8fb255cdff" providerId="LiveId" clId="{7ED8CE5E-C9C1-EA4A-B7F5-F18449D1C39F}" dt="2025-04-30T17:49:36.209" v="28" actId="478"/>
+          <ac:grpSpMkLst>
+            <pc:docMk/>
+            <pc:sldMk cId="693965776" sldId="260"/>
+            <ac:grpSpMk id="6" creationId="{54A10823-3171-BB62-8AA0-89A5478F07D1}"/>
+          </ac:grpSpMkLst>
+        </pc:grpChg>
+        <pc:grpChg chg="add del mod">
+          <ac:chgData name="Ziyang Chen" userId="1924be8fb255cdff" providerId="LiveId" clId="{7ED8CE5E-C9C1-EA4A-B7F5-F18449D1C39F}" dt="2025-04-30T17:49:32.539" v="24" actId="165"/>
+          <ac:grpSpMkLst>
+            <pc:docMk/>
+            <pc:sldMk cId="693965776" sldId="260"/>
+            <ac:grpSpMk id="7" creationId="{28CC23CC-21FC-ED13-A0ED-585D8CF18166}"/>
+          </ac:grpSpMkLst>
+        </pc:grpChg>
+        <pc:grpChg chg="add">
+          <ac:chgData name="Ziyang Chen" userId="1924be8fb255cdff" providerId="LiveId" clId="{7ED8CE5E-C9C1-EA4A-B7F5-F18449D1C39F}" dt="2025-04-30T18:06:45.593" v="60" actId="164"/>
+          <ac:grpSpMkLst>
+            <pc:docMk/>
+            <pc:sldMk cId="693965776" sldId="260"/>
+            <ac:grpSpMk id="12" creationId="{2A0C75F4-DBCF-1CC8-E5CB-A85F5292BC27}"/>
+          </ac:grpSpMkLst>
+        </pc:grpChg>
+        <pc:picChg chg="add mod">
+          <ac:chgData name="Ziyang Chen" userId="1924be8fb255cdff" providerId="LiveId" clId="{7ED8CE5E-C9C1-EA4A-B7F5-F18449D1C39F}" dt="2025-04-30T17:49:10.562" v="21" actId="1076"/>
+          <ac:picMkLst>
+            <pc:docMk/>
+            <pc:sldMk cId="693965776" sldId="260"/>
+            <ac:picMk id="4" creationId="{4D779901-A9FF-E55F-C10D-239EAAB64F33}"/>
+          </ac:picMkLst>
+        </pc:picChg>
+        <pc:picChg chg="del mod topLvl">
+          <ac:chgData name="Ziyang Chen" userId="1924be8fb255cdff" providerId="LiveId" clId="{7ED8CE5E-C9C1-EA4A-B7F5-F18449D1C39F}" dt="2025-04-30T18:06:25.497" v="55" actId="478"/>
+          <ac:picMkLst>
+            <pc:docMk/>
+            <pc:sldMk cId="693965776" sldId="260"/>
+            <ac:picMk id="9" creationId="{8EB1B040-68EA-BEFF-DFC9-F0F7BCE33601}"/>
+          </ac:picMkLst>
+        </pc:picChg>
+        <pc:picChg chg="add mod">
+          <ac:chgData name="Ziyang Chen" userId="1924be8fb255cdff" providerId="LiveId" clId="{7ED8CE5E-C9C1-EA4A-B7F5-F18449D1C39F}" dt="2025-04-30T18:05:52.242" v="53" actId="1076"/>
+          <ac:picMkLst>
+            <pc:docMk/>
+            <pc:sldMk cId="693965776" sldId="260"/>
+            <ac:picMk id="11" creationId="{C8D16219-AB47-3909-6264-0B865E0D1A6E}"/>
+          </ac:picMkLst>
+        </pc:picChg>
+      </pc:sldChg>
+      <pc:sldChg chg="addSp delSp modSp add mod setBg">
+        <pc:chgData name="Ziyang Chen" userId="1924be8fb255cdff" providerId="LiveId" clId="{7ED8CE5E-C9C1-EA4A-B7F5-F18449D1C39F}" dt="2025-04-30T18:27:16.100" v="137" actId="164"/>
+        <pc:sldMkLst>
+          <pc:docMk/>
+          <pc:sldMk cId="2680892058" sldId="261"/>
+        </pc:sldMkLst>
+        <pc:spChg chg="add mod">
+          <ac:chgData name="Ziyang Chen" userId="1924be8fb255cdff" providerId="LiveId" clId="{7ED8CE5E-C9C1-EA4A-B7F5-F18449D1C39F}" dt="2025-04-30T18:18:04.047" v="83" actId="1076"/>
+          <ac:spMkLst>
+            <pc:docMk/>
+            <pc:sldMk cId="2680892058" sldId="261"/>
+            <ac:spMk id="2" creationId="{64364073-F9C4-7AC3-E47F-62B103F4F661}"/>
+          </ac:spMkLst>
+        </pc:spChg>
+        <pc:spChg chg="del topLvl">
+          <ac:chgData name="Ziyang Chen" userId="1924be8fb255cdff" providerId="LiveId" clId="{7ED8CE5E-C9C1-EA4A-B7F5-F18449D1C39F}" dt="2025-04-30T18:16:59.501" v="76" actId="478"/>
+          <ac:spMkLst>
+            <pc:docMk/>
+            <pc:sldMk cId="2680892058" sldId="261"/>
+            <ac:spMk id="9" creationId="{F921BAC4-7697-EBE3-E9B3-1D6F1D1570B1}"/>
+          </ac:spMkLst>
+        </pc:spChg>
+        <pc:grpChg chg="del">
+          <ac:chgData name="Ziyang Chen" userId="1924be8fb255cdff" providerId="LiveId" clId="{7ED8CE5E-C9C1-EA4A-B7F5-F18449D1C39F}" dt="2025-04-30T18:16:59.501" v="76" actId="478"/>
+          <ac:grpSpMkLst>
+            <pc:docMk/>
+            <pc:sldMk cId="2680892058" sldId="261"/>
+            <ac:grpSpMk id="10" creationId="{5DC79703-0CF2-4F41-D5E5-7D889A1FE3D0}"/>
+          </ac:grpSpMkLst>
+        </pc:grpChg>
+        <pc:grpChg chg="add">
+          <ac:chgData name="Ziyang Chen" userId="1924be8fb255cdff" providerId="LiveId" clId="{7ED8CE5E-C9C1-EA4A-B7F5-F18449D1C39F}" dt="2025-04-30T18:27:16.100" v="137" actId="164"/>
+          <ac:grpSpMkLst>
+            <pc:docMk/>
+            <pc:sldMk cId="2680892058" sldId="261"/>
+            <ac:grpSpMk id="16" creationId="{7D673019-4FFF-9603-A16C-DE00EEE5EA7E}"/>
+          </ac:grpSpMkLst>
+        </pc:grpChg>
+        <pc:picChg chg="add del mod">
+          <ac:chgData name="Ziyang Chen" userId="1924be8fb255cdff" providerId="LiveId" clId="{7ED8CE5E-C9C1-EA4A-B7F5-F18449D1C39F}" dt="2025-04-30T18:18:08.502" v="84" actId="478"/>
+          <ac:picMkLst>
+            <pc:docMk/>
+            <pc:sldMk cId="2680892058" sldId="261"/>
+            <ac:picMk id="4" creationId="{D6EA5D57-F3CD-470B-F18A-49AE9B45643C}"/>
+          </ac:picMkLst>
+        </pc:picChg>
+        <pc:picChg chg="add del mod">
+          <ac:chgData name="Ziyang Chen" userId="1924be8fb255cdff" providerId="LiveId" clId="{7ED8CE5E-C9C1-EA4A-B7F5-F18449D1C39F}" dt="2025-04-30T18:25:19.614" v="107" actId="478"/>
+          <ac:picMkLst>
+            <pc:docMk/>
+            <pc:sldMk cId="2680892058" sldId="261"/>
+            <ac:picMk id="5" creationId="{AF934065-BAFB-B26E-96DF-A547896B0C5F}"/>
+          </ac:picMkLst>
+        </pc:picChg>
+        <pc:picChg chg="add del mod">
+          <ac:chgData name="Ziyang Chen" userId="1924be8fb255cdff" providerId="LiveId" clId="{7ED8CE5E-C9C1-EA4A-B7F5-F18449D1C39F}" dt="2025-04-30T18:24:33.584" v="94" actId="478"/>
+          <ac:picMkLst>
+            <pc:docMk/>
+            <pc:sldMk cId="2680892058" sldId="261"/>
+            <ac:picMk id="6" creationId="{A56DEEBF-8F57-53A8-93B8-1EF7287DBD80}"/>
+          </ac:picMkLst>
+        </pc:picChg>
+        <pc:picChg chg="add mod">
+          <ac:chgData name="Ziyang Chen" userId="1924be8fb255cdff" providerId="LiveId" clId="{7ED8CE5E-C9C1-EA4A-B7F5-F18449D1C39F}" dt="2025-04-30T18:25:25.487" v="109" actId="1076"/>
+          <ac:picMkLst>
+            <pc:docMk/>
+            <pc:sldMk cId="2680892058" sldId="261"/>
+            <ac:picMk id="7" creationId="{C2F9D8CC-F859-8BDE-5444-7005046AD564}"/>
+          </ac:picMkLst>
+        </pc:picChg>
+        <pc:picChg chg="del topLvl">
+          <ac:chgData name="Ziyang Chen" userId="1924be8fb255cdff" providerId="LiveId" clId="{7ED8CE5E-C9C1-EA4A-B7F5-F18449D1C39F}" dt="2025-04-30T18:17:01.431" v="77" actId="478"/>
+          <ac:picMkLst>
+            <pc:docMk/>
+            <pc:sldMk cId="2680892058" sldId="261"/>
+            <ac:picMk id="8" creationId="{020F78C9-E242-8FB7-B266-8CFAC498FB5A}"/>
+          </ac:picMkLst>
+        </pc:picChg>
+        <pc:picChg chg="add del mod">
+          <ac:chgData name="Ziyang Chen" userId="1924be8fb255cdff" providerId="LiveId" clId="{7ED8CE5E-C9C1-EA4A-B7F5-F18449D1C39F}" dt="2025-04-30T18:26:19.680" v="120" actId="478"/>
+          <ac:picMkLst>
+            <pc:docMk/>
+            <pc:sldMk cId="2680892058" sldId="261"/>
+            <ac:picMk id="11" creationId="{AE98F209-2F2D-F347-E263-1AC020555A61}"/>
+          </ac:picMkLst>
+        </pc:picChg>
+        <pc:picChg chg="add">
+          <ac:chgData name="Ziyang Chen" userId="1924be8fb255cdff" providerId="LiveId" clId="{7ED8CE5E-C9C1-EA4A-B7F5-F18449D1C39F}" dt="2025-04-30T18:25:47.079" v="115"/>
+          <ac:picMkLst>
+            <pc:docMk/>
+            <pc:sldMk cId="2680892058" sldId="261"/>
+            <ac:picMk id="12" creationId="{DBF0B040-6878-9AEF-83D6-CDA5FF4D18B0}"/>
+          </ac:picMkLst>
+        </pc:picChg>
+        <pc:picChg chg="add del mod">
+          <ac:chgData name="Ziyang Chen" userId="1924be8fb255cdff" providerId="LiveId" clId="{7ED8CE5E-C9C1-EA4A-B7F5-F18449D1C39F}" dt="2025-04-30T18:26:43.722" v="129" actId="478"/>
+          <ac:picMkLst>
+            <pc:docMk/>
+            <pc:sldMk cId="2680892058" sldId="261"/>
+            <ac:picMk id="13" creationId="{05353A7E-F25E-3188-C310-005E8C08DE2F}"/>
+          </ac:picMkLst>
+        </pc:picChg>
+        <pc:picChg chg="add mod">
+          <ac:chgData name="Ziyang Chen" userId="1924be8fb255cdff" providerId="LiveId" clId="{7ED8CE5E-C9C1-EA4A-B7F5-F18449D1C39F}" dt="2025-04-30T18:26:40.647" v="127" actId="1076"/>
+          <ac:picMkLst>
+            <pc:docMk/>
+            <pc:sldMk cId="2680892058" sldId="261"/>
+            <ac:picMk id="14" creationId="{0A03D520-D794-1367-68C1-9D535DE48517}"/>
+          </ac:picMkLst>
+        </pc:picChg>
+        <pc:picChg chg="add mod">
+          <ac:chgData name="Ziyang Chen" userId="1924be8fb255cdff" providerId="LiveId" clId="{7ED8CE5E-C9C1-EA4A-B7F5-F18449D1C39F}" dt="2025-04-30T18:27:04.438" v="136" actId="688"/>
+          <ac:picMkLst>
+            <pc:docMk/>
+            <pc:sldMk cId="2680892058" sldId="261"/>
+            <ac:picMk id="15" creationId="{74265DAB-E4A6-477B-7BE3-BC839BAF0778}"/>
+          </ac:picMkLst>
+        </pc:picChg>
+      </pc:sldChg>
+      <pc:sldChg chg="delSp add del mod">
+        <pc:chgData name="Ziyang Chen" userId="1924be8fb255cdff" providerId="LiveId" clId="{7ED8CE5E-C9C1-EA4A-B7F5-F18449D1C39F}" dt="2025-04-30T17:52:47.974" v="32" actId="2696"/>
+        <pc:sldMkLst>
+          <pc:docMk/>
+          <pc:sldMk cId="3773615227" sldId="261"/>
+        </pc:sldMkLst>
+        <pc:spChg chg="del topLvl">
+          <ac:chgData name="Ziyang Chen" userId="1924be8fb255cdff" providerId="LiveId" clId="{7ED8CE5E-C9C1-EA4A-B7F5-F18449D1C39F}" dt="2025-04-30T17:51:13.890" v="31" actId="478"/>
+          <ac:spMkLst>
+            <pc:docMk/>
+            <pc:sldMk cId="3773615227" sldId="261"/>
+            <ac:spMk id="22" creationId="{7900704F-57F3-0AB9-D455-01DD2B10A2D7}"/>
+          </ac:spMkLst>
+        </pc:spChg>
+        <pc:grpChg chg="topLvl">
+          <ac:chgData name="Ziyang Chen" userId="1924be8fb255cdff" providerId="LiveId" clId="{7ED8CE5E-C9C1-EA4A-B7F5-F18449D1C39F}" dt="2025-04-30T17:51:13.890" v="31" actId="478"/>
+          <ac:grpSpMkLst>
+            <pc:docMk/>
+            <pc:sldMk cId="3773615227" sldId="261"/>
+            <ac:grpSpMk id="21" creationId="{33FDC0D7-6C5B-04A9-2007-B61BD15D74DA}"/>
+          </ac:grpSpMkLst>
+        </pc:grpChg>
+        <pc:grpChg chg="del">
+          <ac:chgData name="Ziyang Chen" userId="1924be8fb255cdff" providerId="LiveId" clId="{7ED8CE5E-C9C1-EA4A-B7F5-F18449D1C39F}" dt="2025-04-30T17:51:13.890" v="31" actId="478"/>
+          <ac:grpSpMkLst>
+            <pc:docMk/>
+            <pc:sldMk cId="3773615227" sldId="261"/>
+            <ac:grpSpMk id="23" creationId="{1C675284-4E74-D9DC-2444-1DC61AC8F97B}"/>
+          </ac:grpSpMkLst>
+        </pc:grpChg>
+      </pc:sldChg>
+    </pc:docChg>
+  </pc:docChgLst>
 </pc:chgInfo>
 </file>
 
@@ -466,7 +633,7 @@
           <a:p>
             <a:fld id="{3FEC199F-4198-4061-A48E-45842FC1156B}" type="datetimeFigureOut">
               <a:rPr lang="en-US" smtClean="0"/>
-              <a:t>12/8/24</a:t>
+              <a:t>4/30/25</a:t>
             </a:fld>
             <a:endParaRPr lang="en-US"/>
           </a:p>
@@ -666,7 +833,7 @@
           <a:p>
             <a:fld id="{3FEC199F-4198-4061-A48E-45842FC1156B}" type="datetimeFigureOut">
               <a:rPr lang="en-US" smtClean="0"/>
-              <a:t>12/8/24</a:t>
+              <a:t>4/30/25</a:t>
             </a:fld>
             <a:endParaRPr lang="en-US"/>
           </a:p>
@@ -876,7 +1043,7 @@
           <a:p>
             <a:fld id="{3FEC199F-4198-4061-A48E-45842FC1156B}" type="datetimeFigureOut">
               <a:rPr lang="en-US" smtClean="0"/>
-              <a:t>12/8/24</a:t>
+              <a:t>4/30/25</a:t>
             </a:fld>
             <a:endParaRPr lang="en-US"/>
           </a:p>
@@ -1076,7 +1243,7 @@
           <a:p>
             <a:fld id="{3FEC199F-4198-4061-A48E-45842FC1156B}" type="datetimeFigureOut">
               <a:rPr lang="en-US" smtClean="0"/>
-              <a:t>12/8/24</a:t>
+              <a:t>4/30/25</a:t>
             </a:fld>
             <a:endParaRPr lang="en-US"/>
           </a:p>
@@ -1352,7 +1519,7 @@
           <a:p>
             <a:fld id="{3FEC199F-4198-4061-A48E-45842FC1156B}" type="datetimeFigureOut">
               <a:rPr lang="en-US" smtClean="0"/>
-              <a:t>12/8/24</a:t>
+              <a:t>4/30/25</a:t>
             </a:fld>
             <a:endParaRPr lang="en-US"/>
           </a:p>
@@ -1620,7 +1787,7 @@
           <a:p>
             <a:fld id="{3FEC199F-4198-4061-A48E-45842FC1156B}" type="datetimeFigureOut">
               <a:rPr lang="en-US" smtClean="0"/>
-              <a:t>12/8/24</a:t>
+              <a:t>4/30/25</a:t>
             </a:fld>
             <a:endParaRPr lang="en-US"/>
           </a:p>
@@ -2035,7 +2202,7 @@
           <a:p>
             <a:fld id="{3FEC199F-4198-4061-A48E-45842FC1156B}" type="datetimeFigureOut">
               <a:rPr lang="en-US" smtClean="0"/>
-              <a:t>12/8/24</a:t>
+              <a:t>4/30/25</a:t>
             </a:fld>
             <a:endParaRPr lang="en-US"/>
           </a:p>
@@ -2177,7 +2344,7 @@
           <a:p>
             <a:fld id="{3FEC199F-4198-4061-A48E-45842FC1156B}" type="datetimeFigureOut">
               <a:rPr lang="en-US" smtClean="0"/>
-              <a:t>12/8/24</a:t>
+              <a:t>4/30/25</a:t>
             </a:fld>
             <a:endParaRPr lang="en-US"/>
           </a:p>
@@ -2290,7 +2457,7 @@
           <a:p>
             <a:fld id="{3FEC199F-4198-4061-A48E-45842FC1156B}" type="datetimeFigureOut">
               <a:rPr lang="en-US" smtClean="0"/>
-              <a:t>12/8/24</a:t>
+              <a:t>4/30/25</a:t>
             </a:fld>
             <a:endParaRPr lang="en-US"/>
           </a:p>
@@ -2603,7 +2770,7 @@
           <a:p>
             <a:fld id="{3FEC199F-4198-4061-A48E-45842FC1156B}" type="datetimeFigureOut">
               <a:rPr lang="en-US" smtClean="0"/>
-              <a:t>12/8/24</a:t>
+              <a:t>4/30/25</a:t>
             </a:fld>
             <a:endParaRPr lang="en-US"/>
           </a:p>
@@ -2892,7 +3059,7 @@
           <a:p>
             <a:fld id="{3FEC199F-4198-4061-A48E-45842FC1156B}" type="datetimeFigureOut">
               <a:rPr lang="en-US" smtClean="0"/>
-              <a:t>12/8/24</a:t>
+              <a:t>4/30/25</a:t>
             </a:fld>
             <a:endParaRPr lang="en-US"/>
           </a:p>
@@ -3135,7 +3302,7 @@
           <a:p>
             <a:fld id="{3FEC199F-4198-4061-A48E-45842FC1156B}" type="datetimeFigureOut">
               <a:rPr lang="en-US" smtClean="0"/>
-              <a:t>12/8/24</a:t>
+              <a:t>4/30/25</a:t>
             </a:fld>
             <a:endParaRPr lang="en-US"/>
           </a:p>
@@ -3930,6 +4097,342 @@
 <file path=ppt/slides/slide2.xml><?xml version="1.0" encoding="utf-8"?>
 <p:sld xmlns:a="http://schemas.openxmlformats.org/drawingml/2006/main" xmlns:r="http://schemas.openxmlformats.org/officeDocument/2006/relationships" xmlns:p="http://schemas.openxmlformats.org/presentationml/2006/main">
   <p:cSld>
+    <p:spTree>
+      <p:nvGrpSpPr>
+        <p:cNvPr id="1" name=""/>
+        <p:cNvGrpSpPr/>
+        <p:nvPr/>
+      </p:nvGrpSpPr>
+      <p:grpSpPr>
+        <a:xfrm>
+          <a:off x="0" y="0"/>
+          <a:ext cx="0" cy="0"/>
+          <a:chOff x="0" y="0"/>
+          <a:chExt cx="0" cy="0"/>
+        </a:xfrm>
+      </p:grpSpPr>
+      <p:grpSp>
+        <p:nvGrpSpPr>
+          <p:cNvPr id="12" name="Group 11">
+            <a:extLst>
+              <a:ext uri="{FF2B5EF4-FFF2-40B4-BE49-F238E27FC236}">
+                <a16:creationId xmlns:a16="http://schemas.microsoft.com/office/drawing/2014/main" id="{2A0C75F4-DBCF-1CC8-E5CB-A85F5292BC27}"/>
+              </a:ext>
+            </a:extLst>
+          </p:cNvPr>
+          <p:cNvGrpSpPr/>
+          <p:nvPr/>
+        </p:nvGrpSpPr>
+        <p:grpSpPr>
+          <a:xfrm>
+            <a:off x="6616700" y="1714500"/>
+            <a:ext cx="4114800" cy="3530600"/>
+            <a:chOff x="6616700" y="1714500"/>
+            <a:chExt cx="4114800" cy="3530600"/>
+          </a:xfrm>
+        </p:grpSpPr>
+        <p:sp>
+          <p:nvSpPr>
+            <p:cNvPr id="10" name="矩形 21">
+              <a:extLst>
+                <a:ext uri="{FF2B5EF4-FFF2-40B4-BE49-F238E27FC236}">
+                  <a16:creationId xmlns:a16="http://schemas.microsoft.com/office/drawing/2014/main" id="{DA80ADD2-12CA-23B1-494F-6C4388C77FEF}"/>
+                </a:ext>
+              </a:extLst>
+            </p:cNvPr>
+            <p:cNvSpPr/>
+            <p:nvPr/>
+          </p:nvSpPr>
+          <p:spPr>
+            <a:xfrm>
+              <a:off x="6616700" y="1714500"/>
+              <a:ext cx="4114800" cy="3530600"/>
+            </a:xfrm>
+            <a:prstGeom prst="rect">
+              <a:avLst/>
+            </a:prstGeom>
+            <a:solidFill>
+              <a:schemeClr val="bg1">
+                <a:lumMod val="95000"/>
+              </a:schemeClr>
+            </a:solidFill>
+            <a:ln>
+              <a:noFill/>
+            </a:ln>
+          </p:spPr>
+          <p:style>
+            <a:lnRef idx="2">
+              <a:schemeClr val="accent1">
+                <a:shade val="15000"/>
+              </a:schemeClr>
+            </a:lnRef>
+            <a:fillRef idx="1">
+              <a:schemeClr val="accent1"/>
+            </a:fillRef>
+            <a:effectRef idx="0">
+              <a:schemeClr val="accent1"/>
+            </a:effectRef>
+            <a:fontRef idx="minor">
+              <a:schemeClr val="lt1"/>
+            </a:fontRef>
+          </p:style>
+          <p:txBody>
+            <a:bodyPr rtlCol="0" anchor="ctr"/>
+            <a:lstStyle/>
+            <a:p>
+              <a:pPr algn="ctr"/>
+              <a:endParaRPr lang="en-US"/>
+            </a:p>
+          </p:txBody>
+        </p:sp>
+        <p:pic>
+          <p:nvPicPr>
+            <p:cNvPr id="11" name="Picture 10">
+              <a:extLst>
+                <a:ext uri="{FF2B5EF4-FFF2-40B4-BE49-F238E27FC236}">
+                  <a16:creationId xmlns:a16="http://schemas.microsoft.com/office/drawing/2014/main" id="{C8D16219-AB47-3909-6264-0B865E0D1A6E}"/>
+                </a:ext>
+              </a:extLst>
+            </p:cNvPr>
+            <p:cNvPicPr>
+              <a:picLocks noChangeAspect="1"/>
+            </p:cNvPicPr>
+            <p:nvPr/>
+          </p:nvPicPr>
+          <p:blipFill>
+            <a:blip r:embed="rId2"/>
+            <a:stretch>
+              <a:fillRect/>
+            </a:stretch>
+          </p:blipFill>
+          <p:spPr>
+            <a:xfrm>
+              <a:off x="6705600" y="2129366"/>
+              <a:ext cx="3898900" cy="2599266"/>
+            </a:xfrm>
+            <a:prstGeom prst="rect">
+              <a:avLst/>
+            </a:prstGeom>
+          </p:spPr>
+        </p:pic>
+      </p:grpSp>
+    </p:spTree>
+    <p:extLst>
+      <p:ext uri="{BB962C8B-B14F-4D97-AF65-F5344CB8AC3E}">
+        <p14:creationId xmlns:p14="http://schemas.microsoft.com/office/powerpoint/2010/main" val="693965776"/>
+      </p:ext>
+    </p:extLst>
+  </p:cSld>
+  <p:clrMapOvr>
+    <a:masterClrMapping/>
+  </p:clrMapOvr>
+</p:sld>
+</file>
+
+<file path=ppt/slides/slide3.xml><?xml version="1.0" encoding="utf-8"?>
+<p:sld xmlns:a="http://schemas.openxmlformats.org/drawingml/2006/main" xmlns:r="http://schemas.openxmlformats.org/officeDocument/2006/relationships" xmlns:p="http://schemas.openxmlformats.org/presentationml/2006/main">
+  <p:cSld>
+    <p:spTree>
+      <p:nvGrpSpPr>
+        <p:cNvPr id="1" name="">
+          <a:extLst>
+            <a:ext uri="{FF2B5EF4-FFF2-40B4-BE49-F238E27FC236}">
+              <a16:creationId xmlns:a16="http://schemas.microsoft.com/office/drawing/2014/main" id="{E26AC4C7-0974-E43D-EB72-70221C94E6D2}"/>
+            </a:ext>
+          </a:extLst>
+        </p:cNvPr>
+        <p:cNvGrpSpPr/>
+        <p:nvPr/>
+      </p:nvGrpSpPr>
+      <p:grpSpPr>
+        <a:xfrm>
+          <a:off x="0" y="0"/>
+          <a:ext cx="0" cy="0"/>
+          <a:chOff x="0" y="0"/>
+          <a:chExt cx="0" cy="0"/>
+        </a:xfrm>
+      </p:grpSpPr>
+      <p:grpSp>
+        <p:nvGrpSpPr>
+          <p:cNvPr id="16" name="Group 15">
+            <a:extLst>
+              <a:ext uri="{FF2B5EF4-FFF2-40B4-BE49-F238E27FC236}">
+                <a16:creationId xmlns:a16="http://schemas.microsoft.com/office/drawing/2014/main" id="{7D673019-4FFF-9603-A16C-DE00EEE5EA7E}"/>
+              </a:ext>
+            </a:extLst>
+          </p:cNvPr>
+          <p:cNvGrpSpPr/>
+          <p:nvPr/>
+        </p:nvGrpSpPr>
+        <p:grpSpPr>
+          <a:xfrm>
+            <a:off x="3340313" y="1485900"/>
+            <a:ext cx="3631987" cy="3606800"/>
+            <a:chOff x="3340313" y="1485900"/>
+            <a:chExt cx="3631987" cy="3606800"/>
+          </a:xfrm>
+        </p:grpSpPr>
+        <p:sp>
+          <p:nvSpPr>
+            <p:cNvPr id="2" name="矩形 21">
+              <a:extLst>
+                <a:ext uri="{FF2B5EF4-FFF2-40B4-BE49-F238E27FC236}">
+                  <a16:creationId xmlns:a16="http://schemas.microsoft.com/office/drawing/2014/main" id="{64364073-F9C4-7AC3-E47F-62B103F4F661}"/>
+                </a:ext>
+              </a:extLst>
+            </p:cNvPr>
+            <p:cNvSpPr/>
+            <p:nvPr/>
+          </p:nvSpPr>
+          <p:spPr>
+            <a:xfrm>
+              <a:off x="3340313" y="1494356"/>
+              <a:ext cx="3622158" cy="3430772"/>
+            </a:xfrm>
+            <a:prstGeom prst="rect">
+              <a:avLst/>
+            </a:prstGeom>
+            <a:solidFill>
+              <a:schemeClr val="bg1">
+                <a:lumMod val="95000"/>
+              </a:schemeClr>
+            </a:solidFill>
+            <a:ln>
+              <a:noFill/>
+            </a:ln>
+          </p:spPr>
+          <p:style>
+            <a:lnRef idx="2">
+              <a:schemeClr val="accent1">
+                <a:shade val="15000"/>
+              </a:schemeClr>
+            </a:lnRef>
+            <a:fillRef idx="1">
+              <a:schemeClr val="accent1"/>
+            </a:fillRef>
+            <a:effectRef idx="0">
+              <a:schemeClr val="accent1"/>
+            </a:effectRef>
+            <a:fontRef idx="minor">
+              <a:schemeClr val="lt1"/>
+            </a:fontRef>
+          </p:style>
+          <p:txBody>
+            <a:bodyPr rtlCol="0" anchor="ctr"/>
+            <a:lstStyle/>
+            <a:p>
+              <a:pPr algn="ctr"/>
+              <a:endParaRPr lang="en-US"/>
+            </a:p>
+          </p:txBody>
+        </p:sp>
+        <p:pic>
+          <p:nvPicPr>
+            <p:cNvPr id="7" name="Picture 6">
+              <a:extLst>
+                <a:ext uri="{FF2B5EF4-FFF2-40B4-BE49-F238E27FC236}">
+                  <a16:creationId xmlns:a16="http://schemas.microsoft.com/office/drawing/2014/main" id="{C2F9D8CC-F859-8BDE-5444-7005046AD564}"/>
+                </a:ext>
+              </a:extLst>
+            </p:cNvPr>
+            <p:cNvPicPr>
+              <a:picLocks noChangeAspect="1"/>
+            </p:cNvPicPr>
+            <p:nvPr/>
+          </p:nvPicPr>
+          <p:blipFill>
+            <a:blip r:embed="rId2"/>
+            <a:stretch>
+              <a:fillRect/>
+            </a:stretch>
+          </p:blipFill>
+          <p:spPr>
+            <a:xfrm>
+              <a:off x="3365500" y="1485900"/>
+              <a:ext cx="3606800" cy="3606800"/>
+            </a:xfrm>
+            <a:prstGeom prst="rect">
+              <a:avLst/>
+            </a:prstGeom>
+          </p:spPr>
+        </p:pic>
+        <p:pic>
+          <p:nvPicPr>
+            <p:cNvPr id="14" name="Picture 13">
+              <a:extLst>
+                <a:ext uri="{FF2B5EF4-FFF2-40B4-BE49-F238E27FC236}">
+                  <a16:creationId xmlns:a16="http://schemas.microsoft.com/office/drawing/2014/main" id="{0A03D520-D794-1367-68C1-9D535DE48517}"/>
+                </a:ext>
+              </a:extLst>
+            </p:cNvPr>
+            <p:cNvPicPr>
+              <a:picLocks noChangeAspect="1"/>
+            </p:cNvPicPr>
+            <p:nvPr/>
+          </p:nvPicPr>
+          <p:blipFill>
+            <a:blip r:embed="rId3"/>
+            <a:stretch>
+              <a:fillRect/>
+            </a:stretch>
+          </p:blipFill>
+          <p:spPr>
+            <a:xfrm rot="2171312">
+              <a:off x="4127499" y="2095499"/>
+              <a:ext cx="342900" cy="342900"/>
+            </a:xfrm>
+            <a:prstGeom prst="rect">
+              <a:avLst/>
+            </a:prstGeom>
+          </p:spPr>
+        </p:pic>
+        <p:pic>
+          <p:nvPicPr>
+            <p:cNvPr id="15" name="Picture 14">
+              <a:extLst>
+                <a:ext uri="{FF2B5EF4-FFF2-40B4-BE49-F238E27FC236}">
+                  <a16:creationId xmlns:a16="http://schemas.microsoft.com/office/drawing/2014/main" id="{74265DAB-E4A6-477B-7BE3-BC839BAF0778}"/>
+                </a:ext>
+              </a:extLst>
+            </p:cNvPr>
+            <p:cNvPicPr>
+              <a:picLocks noChangeAspect="1"/>
+            </p:cNvPicPr>
+            <p:nvPr/>
+          </p:nvPicPr>
+          <p:blipFill>
+            <a:blip r:embed="rId3"/>
+            <a:stretch>
+              <a:fillRect/>
+            </a:stretch>
+          </p:blipFill>
+          <p:spPr>
+            <a:xfrm rot="9759957">
+              <a:off x="5943599" y="2387599"/>
+              <a:ext cx="342900" cy="342900"/>
+            </a:xfrm>
+            <a:prstGeom prst="rect">
+              <a:avLst/>
+            </a:prstGeom>
+          </p:spPr>
+        </p:pic>
+      </p:grpSp>
+    </p:spTree>
+    <p:extLst>
+      <p:ext uri="{BB962C8B-B14F-4D97-AF65-F5344CB8AC3E}">
+        <p14:creationId xmlns:p14="http://schemas.microsoft.com/office/powerpoint/2010/main" val="2680892058"/>
+      </p:ext>
+    </p:extLst>
+  </p:cSld>
+  <p:clrMapOvr>
+    <a:masterClrMapping/>
+  </p:clrMapOvr>
+</p:sld>
+</file>
+
+<file path=ppt/slides/slide4.xml><?xml version="1.0" encoding="utf-8"?>
+<p:sld xmlns:a="http://schemas.openxmlformats.org/drawingml/2006/main" xmlns:r="http://schemas.openxmlformats.org/officeDocument/2006/relationships" xmlns:p="http://schemas.openxmlformats.org/presentationml/2006/main">
+  <p:cSld>
     <p:bg>
       <p:bgPr>
         <a:solidFill>
@@ -4020,7 +4523,7 @@
             <a:lstStyle/>
             <a:p>
               <a:pPr algn="ctr"/>
-              <a:endParaRPr lang="en-US"/>
+              <a:endParaRPr lang="en-US" dirty="0"/>
             </a:p>
           </p:txBody>
         </p:sp>
@@ -4080,7 +4583,7 @@
 </p:sld>
 </file>
 
-<file path=ppt/slides/slide3.xml><?xml version="1.0" encoding="utf-8"?>
+<file path=ppt/slides/slide5.xml><?xml version="1.0" encoding="utf-8"?>
 <p:sld xmlns:a="http://schemas.openxmlformats.org/drawingml/2006/main" xmlns:r="http://schemas.openxmlformats.org/officeDocument/2006/relationships" xmlns:p="http://schemas.openxmlformats.org/presentationml/2006/main">
   <p:cSld>
     <p:spTree>
@@ -4784,7 +5287,7 @@
 </p:sld>
 </file>
 
-<file path=ppt/slides/slide4.xml><?xml version="1.0" encoding="utf-8"?>
+<file path=ppt/slides/slide6.xml><?xml version="1.0" encoding="utf-8"?>
 <p:sld xmlns:a="http://schemas.openxmlformats.org/drawingml/2006/main" xmlns:r="http://schemas.openxmlformats.org/officeDocument/2006/relationships" xmlns:p="http://schemas.openxmlformats.org/presentationml/2006/main">
   <p:cSld>
     <p:spTree>
